--- a/ppt/QUANTA_PPT_FINAL.pptx
+++ b/ppt/QUANTA_PPT_FINAL.pptx
@@ -1088,11 +1088,22 @@
 
 <file path=ppt/slideLayouts/slideLayout1.xml><?xml version="1.0" encoding="utf-8"?>
 <p:sldLayout xmlns:a="http://schemas.openxmlformats.org/drawingml/2006/main" xmlns:r="http://schemas.openxmlformats.org/officeDocument/2006/relationships" xmlns:p="http://schemas.openxmlformats.org/presentationml/2006/main" preserve="1">
+  <p:bg>
+    <p:bgPr>
+      <a:solidFill>
+        <a:srgbClr val="FAF6EE"/>
+      </a:solidFill>
+      <a:effectLst/>
+    </p:bgPr>
+  </p:bg>
   <p:cSld name="DEFAULT">
     <p:bg>
-      <p:bgRef idx="1001">
-        <a:schemeClr val="bg1"/>
-      </p:bgRef>
+      <p:bgPr>
+        <a:solidFill>
+          <a:srgbClr val="FAF6EE"/>
+        </a:solidFill>
+        <a:effectLst/>
+      </p:bgPr>
     </p:bg>
     <p:spTree>
       <p:nvGrpSpPr>
@@ -1118,18 +1129,20 @@
 
 <file path=ppt/slideLayouts/slideLayout2.xml><?xml version="1.0" encoding="utf-8"?>
 <p:sldLayout xmlns:a="http://schemas.openxmlformats.org/drawingml/2006/main" xmlns:r="http://schemas.openxmlformats.org/officeDocument/2006/relationships" xmlns:p="http://schemas.openxmlformats.org/presentationml/2006/main" preserve="1">
+  <p:bg>
+    <p:bgPr>
+      <a:solidFill>
+        <a:srgbClr val="FAF6EE"/>
+      </a:solidFill>
+      <a:effectLst/>
+    </p:bgPr>
+  </p:bg>
   <p:cSld name="QUANTA_CONTENT">
     <p:bg>
       <p:bgPr>
-        <a:blipFill dpi="0" rotWithShape="1">
-          <a:blip r:embed="rId2">
-            <a:lum/>
-          </a:blip>
-          <a:srcRect/>
-          <a:stretch>
-            <a:fillRect/>
-          </a:stretch>
-        </a:blipFill>
+        <a:solidFill>
+          <a:srgbClr val="FAF6EE"/>
+        </a:solidFill>
         <a:effectLst/>
       </p:bgPr>
     </p:bg>
@@ -1244,11 +1257,22 @@
 
 <file path=ppt/slideMasters/slideMaster1.xml><?xml version="1.0" encoding="utf-8"?>
 <p:sldMaster xmlns:a="http://schemas.openxmlformats.org/drawingml/2006/main" xmlns:r="http://schemas.openxmlformats.org/officeDocument/2006/relationships" xmlns:p="http://schemas.openxmlformats.org/presentationml/2006/main">
+  <p:bg>
+    <p:bgPr>
+      <a:solidFill>
+        <a:srgbClr val="FAF6EE"/>
+      </a:solidFill>
+      <a:effectLst/>
+    </p:bgPr>
+  </p:bg>
   <p:cSld>
     <p:bg>
-      <p:bgRef idx="1001">
-        <a:schemeClr val="bg1"/>
-      </p:bgRef>
+      <p:bgPr>
+        <a:solidFill>
+          <a:srgbClr val="FAF6EE"/>
+        </a:solidFill>
+        <a:effectLst/>
+      </p:bgPr>
     </p:bg>
     <p:spTree>
       <p:nvGrpSpPr>
@@ -1575,7 +1599,23 @@
 
 <file path=ppt/slides/slide1.xml><?xml version="1.0" encoding="utf-8"?>
 <p:sld xmlns:a="http://schemas.openxmlformats.org/drawingml/2006/main" xmlns:r="http://schemas.openxmlformats.org/officeDocument/2006/relationships" xmlns:p="http://schemas.openxmlformats.org/presentationml/2006/main">
+  <p:bg>
+    <p:bgPr>
+      <a:solidFill>
+        <a:srgbClr val="FAF6EE"/>
+      </a:solidFill>
+      <a:effectLst/>
+    </p:bgPr>
+  </p:bg>
   <p:cSld name="Slide 1">
+    <p:bg>
+      <p:bgPr>
+        <a:solidFill>
+          <a:srgbClr val="FAF6EE"/>
+        </a:solidFill>
+        <a:effectLst/>
+      </p:bgPr>
+    </p:bg>
     <p:spTree>
       <p:nvGrpSpPr>
         <p:cNvPr id="1" name=""/>
@@ -2154,7 +2194,23 @@
 
 <file path=ppt/slides/slide10.xml><?xml version="1.0" encoding="utf-8"?>
 <p:sld xmlns:a="http://schemas.openxmlformats.org/drawingml/2006/main" xmlns:r="http://schemas.openxmlformats.org/officeDocument/2006/relationships" xmlns:p="http://schemas.openxmlformats.org/presentationml/2006/main">
+  <p:bg>
+    <p:bgPr>
+      <a:solidFill>
+        <a:srgbClr val="FAF6EE"/>
+      </a:solidFill>
+      <a:effectLst/>
+    </p:bgPr>
+  </p:bg>
   <p:cSld name="Slide 10">
+    <p:bg>
+      <p:bgPr>
+        <a:solidFill>
+          <a:srgbClr val="FAF6EE"/>
+        </a:solidFill>
+        <a:effectLst/>
+      </p:bgPr>
+    </p:bg>
     <p:spTree>
       <p:nvGrpSpPr>
         <p:cNvPr id="1" name=""/>
@@ -2797,7 +2853,23 @@
 
 <file path=ppt/slides/slide2.xml><?xml version="1.0" encoding="utf-8"?>
 <p:sld xmlns:a="http://schemas.openxmlformats.org/drawingml/2006/main" xmlns:r="http://schemas.openxmlformats.org/officeDocument/2006/relationships" xmlns:p="http://schemas.openxmlformats.org/presentationml/2006/main">
+  <p:bg>
+    <p:bgPr>
+      <a:solidFill>
+        <a:srgbClr val="FAF6EE"/>
+      </a:solidFill>
+      <a:effectLst/>
+    </p:bgPr>
+  </p:bg>
   <p:cSld name="Slide 2">
+    <p:bg>
+      <p:bgPr>
+        <a:solidFill>
+          <a:srgbClr val="FAF6EE"/>
+        </a:solidFill>
+        <a:effectLst/>
+      </p:bgPr>
+    </p:bg>
     <p:spTree>
       <p:nvGrpSpPr>
         <p:cNvPr id="1" name=""/>
@@ -3575,7 +3647,23 @@
 
 <file path=ppt/slides/slide3.xml><?xml version="1.0" encoding="utf-8"?>
 <p:sld xmlns:a="http://schemas.openxmlformats.org/drawingml/2006/main" xmlns:r="http://schemas.openxmlformats.org/officeDocument/2006/relationships" xmlns:p="http://schemas.openxmlformats.org/presentationml/2006/main">
+  <p:bg>
+    <p:bgPr>
+      <a:solidFill>
+        <a:srgbClr val="FAF6EE"/>
+      </a:solidFill>
+      <a:effectLst/>
+    </p:bgPr>
+  </p:bg>
   <p:cSld name="Slide 3">
+    <p:bg>
+      <p:bgPr>
+        <a:solidFill>
+          <a:srgbClr val="FAF6EE"/>
+        </a:solidFill>
+        <a:effectLst/>
+      </p:bgPr>
+    </p:bg>
     <p:spTree>
       <p:nvGrpSpPr>
         <p:cNvPr id="1" name=""/>
@@ -3696,10 +3784,6 @@
             <a:prstDash val="solid"/>
           </a:ln>
         </p:spPr>
-        <p:txBody>
-          <a:bodyPr/>
-          <a:p/>
-        </p:txBody>
       </p:sp>
       <p:sp>
         <p:nvSpPr>
@@ -3722,16 +3806,21 @@
           <a:bodyPr wrap="square" lIns="0" tIns="0" rIns="0" bIns="0" rtlCol="0" anchor="ctr"/>
           <a:lstStyle/>
           <a:p>
-            <a:pPr>
-              <a:defRPr sz="1300" b="1">
+            <a:pPr marL="0" indent="0">
+              <a:buNone/>
+            </a:pPr>
+            <a:r>
+              <a:rPr lang="en-US" sz="1600" b="1" dirty="0">
                 <a:solidFill>
                   <a:srgbClr val="0B1F3A"/>
                 </a:solidFill>
-              </a:defRPr>
-            </a:pPr>
-            <a:r>
-              <a:t>IBM Telco churn: 7,043 rows, 21 columns (78.9% categorical ratio: 15 of 19 features)</a:t>
-            </a:r>
+                <a:latin typeface="Courier New" pitchFamily="34" charset="0"/>
+                <a:ea typeface="Courier New" pitchFamily="34" charset="-122"/>
+                <a:cs typeface="Courier New" pitchFamily="34" charset="-120"/>
+              </a:rPr>
+              <a:t>IBM Telco churn: 7,043 rows, 21 columns (16 categorical)</a:t>
+            </a:r>
+            <a:endParaRPr lang="en-US" sz="1600" dirty="0"/>
           </a:p>
         </p:txBody>
       </p:sp>
@@ -3759,10 +3848,6 @@
             <a:prstDash val="solid"/>
           </a:ln>
         </p:spPr>
-        <p:txBody>
-          <a:bodyPr/>
-          <a:p/>
-        </p:txBody>
       </p:sp>
       <p:sp>
         <p:nvSpPr>
@@ -3788,10 +3873,6 @@
             <a:prstDash val="solid"/>
           </a:ln>
         </p:spPr>
-        <p:txBody>
-          <a:bodyPr/>
-          <a:p/>
-        </p:txBody>
       </p:sp>
       <p:sp>
         <p:nvSpPr>
@@ -3938,10 +4019,6 @@
             <a:prstDash val="solid"/>
           </a:ln>
         </p:spPr>
-        <p:txBody>
-          <a:bodyPr/>
-          <a:p/>
-        </p:txBody>
       </p:sp>
       <p:sp>
         <p:nvSpPr>
@@ -4095,10 +4172,6 @@
             <a:prstDash val="solid"/>
           </a:ln>
         </p:spPr>
-        <p:txBody>
-          <a:bodyPr/>
-          <a:p/>
-        </p:txBody>
       </p:sp>
       <p:sp>
         <p:nvSpPr>
@@ -4231,10 +4304,6 @@
             <a:prstDash val="solid"/>
           </a:ln>
         </p:spPr>
-        <p:txBody>
-          <a:bodyPr/>
-          <a:p/>
-        </p:txBody>
       </p:sp>
       <p:sp>
         <p:nvSpPr>
@@ -4302,40 +4371,61 @@
               </a:spcAft>
               <a:buSzPct val="100000"/>
               <a:buChar char="•"/>
-              <a:defRPr sz="1000">
+            </a:pPr>
+            <a:r>
+              <a:rPr lang="en-US" sz="1300" dirty="0">
                 <a:solidFill>
                   <a:srgbClr val="0B1F3A"/>
                 </a:solidFill>
-              </a:defRPr>
-            </a:pPr>
-            <a:r>
-              <a:t>Contract Type (18.0% SHAP - Month-to-Month 4x churn)</a:t>
+                <a:latin typeface="Calibri" pitchFamily="34" charset="0"/>
+                <a:ea typeface="Calibri" pitchFamily="34" charset="-122"/>
+                <a:cs typeface="Calibri" pitchFamily="34" charset="-120"/>
+              </a:rPr>
+              <a:t>Spend Surge Ratio: sudden bill increases</a:t>
             </a:r>
             <a:endParaRPr lang="en-US" sz="1300" dirty="0"/>
           </a:p>
           <a:p>
-            <a:pPr>
-              <a:defRPr sz="1000">
+            <a:pPr marL="342900" indent="-342900">
+              <a:spcAft>
+                <a:spcPts val="600"/>
+              </a:spcAft>
+              <a:buSzPct val="100000"/>
+              <a:buChar char="•"/>
+            </a:pPr>
+            <a:r>
+              <a:rPr lang="en-US" sz="1300" dirty="0">
                 <a:solidFill>
                   <a:srgbClr val="0B1F3A"/>
                 </a:solidFill>
-              </a:defRPr>
-            </a:pPr>
-            <a:r>
-              <a:t>Spend Surge Ratio (10.0% SHAP - MonthlyToTotalRatio)</a:t>
-            </a:r>
-          </a:p>
-          <a:p>
-            <a:pPr>
-              <a:defRPr sz="1000">
+                <a:latin typeface="Calibri" pitchFamily="34" charset="0"/>
+                <a:ea typeface="Calibri" pitchFamily="34" charset="-122"/>
+                <a:cs typeface="Calibri" pitchFamily="34" charset="-120"/>
+              </a:rPr>
+              <a:t>Service Lock-In Index: count of active add-ons</a:t>
+            </a:r>
+            <a:endParaRPr lang="en-US" sz="1300" dirty="0"/>
+          </a:p>
+          <a:p>
+            <a:pPr marL="342900" indent="-342900">
+              <a:spcAft>
+                <a:spcPts val="600"/>
+              </a:spcAft>
+              <a:buSzPct val="100000"/>
+              <a:buChar char="•"/>
+            </a:pPr>
+            <a:r>
+              <a:rPr lang="en-US" sz="1300" dirty="0">
                 <a:solidFill>
                   <a:srgbClr val="0B1F3A"/>
                 </a:solidFill>
-              </a:defRPr>
-            </a:pPr>
-            <a:r>
-              <a:t>Tenure lifecycle (8.2%) &amp; Fiber Optic vs DSL (6.4%)</a:t>
-            </a:r>
+                <a:latin typeface="Calibri" pitchFamily="34" charset="0"/>
+                <a:ea typeface="Calibri" pitchFamily="34" charset="-122"/>
+                <a:cs typeface="Calibri" pitchFamily="34" charset="-120"/>
+              </a:rPr>
+              <a:t>High-Risk Contract Flag: month-to-month + e-check</a:t>
+            </a:r>
+            <a:endParaRPr lang="en-US" sz="1300" dirty="0"/>
           </a:p>
         </p:txBody>
       </p:sp>
@@ -4367,10 +4457,6 @@
             <a:prstDash val="solid"/>
           </a:ln>
         </p:spPr>
-        <p:txBody>
-          <a:bodyPr/>
-          <a:p/>
-        </p:txBody>
       </p:sp>
       <p:sp>
         <p:nvSpPr>
@@ -4533,7 +4619,23 @@
 
 <file path=ppt/slides/slide4.xml><?xml version="1.0" encoding="utf-8"?>
 <p:sld xmlns:a="http://schemas.openxmlformats.org/drawingml/2006/main" xmlns:r="http://schemas.openxmlformats.org/officeDocument/2006/relationships" xmlns:p="http://schemas.openxmlformats.org/presentationml/2006/main">
+  <p:bg>
+    <p:bgPr>
+      <a:solidFill>
+        <a:srgbClr val="FAF6EE"/>
+      </a:solidFill>
+      <a:effectLst/>
+    </p:bgPr>
+  </p:bg>
   <p:cSld name="Slide 4">
+    <p:bg>
+      <p:bgPr>
+        <a:solidFill>
+          <a:srgbClr val="FAF6EE"/>
+        </a:solidFill>
+        <a:effectLst/>
+      </p:bgPr>
+    </p:bg>
     <p:spTree>
       <p:nvGrpSpPr>
         <p:cNvPr id="1" name=""/>
@@ -5748,7 +5850,23 @@
 
 <file path=ppt/slides/slide5.xml><?xml version="1.0" encoding="utf-8"?>
 <p:sld xmlns:a="http://schemas.openxmlformats.org/drawingml/2006/main" xmlns:r="http://schemas.openxmlformats.org/officeDocument/2006/relationships" xmlns:p="http://schemas.openxmlformats.org/presentationml/2006/main">
+  <p:bg>
+    <p:bgPr>
+      <a:solidFill>
+        <a:srgbClr val="FAF6EE"/>
+      </a:solidFill>
+      <a:effectLst/>
+    </p:bgPr>
+  </p:bg>
   <p:cSld name="Slide 5">
+    <p:bg>
+      <p:bgPr>
+        <a:solidFill>
+          <a:srgbClr val="FAF6EE"/>
+        </a:solidFill>
+        <a:effectLst/>
+      </p:bgPr>
+    </p:bg>
     <p:spTree>
       <p:nvGrpSpPr>
         <p:cNvPr id="1" name=""/>
@@ -5869,10 +5987,6 @@
             <a:prstDash val="solid"/>
           </a:ln>
         </p:spPr>
-        <p:txBody>
-          <a:bodyPr/>
-          <a:p/>
-        </p:txBody>
       </p:sp>
       <p:sp>
         <p:nvSpPr>
@@ -5941,10 +6055,6 @@
             <a:prstDash val="solid"/>
           </a:ln>
         </p:spPr>
-        <p:txBody>
-          <a:bodyPr/>
-          <a:p/>
-        </p:txBody>
       </p:sp>
       <p:sp>
         <p:nvSpPr>
@@ -6052,10 +6162,6 @@
             <a:prstDash val="solid"/>
           </a:ln>
         </p:spPr>
-        <p:txBody>
-          <a:bodyPr/>
-          <a:p/>
-        </p:txBody>
       </p:sp>
       <p:sp>
         <p:nvSpPr>
@@ -6163,10 +6269,6 @@
             <a:prstDash val="solid"/>
           </a:ln>
         </p:spPr>
-        <p:txBody>
-          <a:bodyPr/>
-          <a:p/>
-        </p:txBody>
       </p:sp>
       <p:sp>
         <p:nvSpPr>
@@ -6272,10 +6374,6 @@
             <a:prstDash val="solid"/>
           </a:ln>
         </p:spPr>
-        <p:txBody>
-          <a:bodyPr/>
-          <a:p/>
-        </p:txBody>
       </p:sp>
       <p:sp>
         <p:nvSpPr>
@@ -6383,10 +6481,6 @@
             <a:prstDash val="solid"/>
           </a:ln>
         </p:spPr>
-        <p:txBody>
-          <a:bodyPr/>
-          <a:p/>
-        </p:txBody>
       </p:sp>
       <p:sp>
         <p:nvSpPr>
@@ -6454,40 +6548,61 @@
               </a:spcAft>
               <a:buSzPct val="100000"/>
               <a:buChar char="•"/>
-              <a:defRPr sz="1050">
+            </a:pPr>
+            <a:r>
+              <a:rPr lang="en-US" sz="1500" dirty="0">
                 <a:solidFill>
                   <a:srgbClr val="0B1F3A"/>
                 </a:solidFill>
-              </a:defRPr>
-            </a:pPr>
-            <a:r>
-              <a:t>Native categorical handling via ordered target statistics prevents leakage across 78.9% categorical features</a:t>
+                <a:latin typeface="Calibri" pitchFamily="34" charset="0"/>
+                <a:ea typeface="Calibri" pitchFamily="34" charset="-122"/>
+                <a:cs typeface="Calibri" pitchFamily="34" charset="-120"/>
+              </a:rPr>
+              <a:t>Native categorical handling via ordered target statistics, so no target leakage and no one-hot blow-up</a:t>
             </a:r>
             <a:endParaRPr lang="en-US" sz="1500" dirty="0"/>
           </a:p>
           <a:p>
-            <a:pPr>
-              <a:defRPr sz="1050">
+            <a:pPr marL="342900" indent="-342900">
+              <a:spcAft>
+                <a:spcPts val="600"/>
+              </a:spcAft>
+              <a:buSzPct val="100000"/>
+              <a:buChar char="•"/>
+            </a:pPr>
+            <a:r>
+              <a:rPr lang="en-US" sz="1500" dirty="0">
                 <a:solidFill>
                   <a:srgbClr val="0B1F3A"/>
                 </a:solidFill>
-              </a:defRPr>
-            </a:pPr>
-            <a:r>
-              <a:t>Symmetric (oblivious) trees resist deep branch overfitting (11.3% overfit vs 39.7% for Random Forest)</a:t>
-            </a:r>
-          </a:p>
-          <a:p>
-            <a:pPr>
-              <a:defRPr sz="1050">
+                <a:latin typeface="Calibri" pitchFamily="34" charset="0"/>
+                <a:ea typeface="Calibri" pitchFamily="34" charset="-122"/>
+                <a:cs typeface="Calibri" pitchFamily="34" charset="-120"/>
+              </a:rPr>
+              <a:t>Symmetric (oblivious) trees resist overfitting on 5,634 rows</a:t>
+            </a:r>
+            <a:endParaRPr lang="en-US" sz="1500" dirty="0"/>
+          </a:p>
+          <a:p>
+            <a:pPr marL="342900" indent="-342900">
+              <a:spcAft>
+                <a:spcPts val="600"/>
+              </a:spcAft>
+              <a:buSzPct val="100000"/>
+              <a:buChar char="•"/>
+            </a:pPr>
+            <a:r>
+              <a:rPr lang="en-US" sz="1500" dirty="0">
                 <a:solidFill>
                   <a:srgbClr val="0B1F3A"/>
                 </a:solidFill>
-              </a:defRPr>
-            </a:pPr>
-            <a:r>
-              <a:t>High non-linear capacity with strong baseline (0.8497 ROC-AUC vs 0.8468 for Logistic Regression)</a:t>
-            </a:r>
+                <a:latin typeface="Calibri" pitchFamily="34" charset="0"/>
+                <a:ea typeface="Calibri" pitchFamily="34" charset="-122"/>
+                <a:cs typeface="Calibri" pitchFamily="34" charset="-120"/>
+              </a:rPr>
+              <a:t>Strong default accuracy, leaving the 15 runs for tuning, not rescuing</a:t>
+            </a:r>
+            <a:endParaRPr lang="en-US" sz="1500" dirty="0"/>
           </a:p>
         </p:txBody>
       </p:sp>
@@ -6519,10 +6634,6 @@
             <a:prstDash val="solid"/>
           </a:ln>
         </p:spPr>
-        <p:txBody>
-          <a:bodyPr/>
-          <a:p/>
-        </p:txBody>
       </p:sp>
       <p:sp>
         <p:nvSpPr>
@@ -6655,10 +6766,6 @@
             <a:prstDash val="solid"/>
           </a:ln>
         </p:spPr>
-        <p:txBody>
-          <a:bodyPr/>
-          <a:p/>
-        </p:txBody>
       </p:sp>
       <p:sp>
         <p:nvSpPr>
@@ -6821,7 +6928,23 @@
 
 <file path=ppt/slides/slide6.xml><?xml version="1.0" encoding="utf-8"?>
 <p:sld xmlns:a="http://schemas.openxmlformats.org/drawingml/2006/main" xmlns:r="http://schemas.openxmlformats.org/officeDocument/2006/relationships" xmlns:p="http://schemas.openxmlformats.org/presentationml/2006/main">
+  <p:bg>
+    <p:bgPr>
+      <a:solidFill>
+        <a:srgbClr val="FAF6EE"/>
+      </a:solidFill>
+      <a:effectLst/>
+    </p:bgPr>
+  </p:bg>
   <p:cSld name="Slide 6">
+    <p:bg>
+      <p:bgPr>
+        <a:solidFill>
+          <a:srgbClr val="FAF6EE"/>
+        </a:solidFill>
+        <a:effectLst/>
+      </p:bgPr>
+    </p:bg>
     <p:spTree>
       <p:nvGrpSpPr>
         <p:cNvPr id="1" name=""/>
@@ -7227,40 +7350,61 @@
               </a:spcAft>
               <a:buSzPct val="100000"/>
               <a:buChar char="•"/>
-              <a:defRPr sz="1100">
+            </a:pPr>
+            <a:r>
+              <a:rPr lang="en-US" sz="1400" dirty="0">
                 <a:solidFill>
                   <a:srgbClr val="0B1F3A"/>
                 </a:solidFill>
-              </a:defRPr>
-            </a:pPr>
-            <a:r>
-              <a:t>Pruned Depth: 6 → 5</a:t>
+                <a:latin typeface="Calibri" pitchFamily="34" charset="0"/>
+                <a:ea typeface="Calibri" pitchFamily="34" charset="-122"/>
+                <a:cs typeface="Calibri" pitchFamily="34" charset="-120"/>
+              </a:rPr>
+              <a:t>Class weight about 1.7</a:t>
             </a:r>
             <a:endParaRPr lang="en-US" sz="1400" dirty="0"/>
           </a:p>
           <a:p>
-            <a:pPr>
-              <a:defRPr sz="1100">
+            <a:pPr marL="342900" indent="-342900">
+              <a:spcAft>
+                <a:spcPts val="600"/>
+              </a:spcAft>
+              <a:buSzPct val="100000"/>
+              <a:buChar char="•"/>
+            </a:pPr>
+            <a:r>
+              <a:rPr lang="en-US" sz="1400" dirty="0">
                 <a:solidFill>
                   <a:srgbClr val="0B1F3A"/>
                 </a:solidFill>
-              </a:defRPr>
-            </a:pPr>
-            <a:r>
-              <a:t>L2 Reg boosted: 8 → 10</a:t>
-            </a:r>
-          </a:p>
-          <a:p>
-            <a:pPr>
-              <a:defRPr sz="1100" b="1">
-                <a:solidFill>
-                  <a:srgbClr val="0F766E"/>
-                </a:solidFill>
-              </a:defRPr>
-            </a:pPr>
-            <a:r>
-              <a:t>Overfit dropped: 11.3% → 5.0%</a:t>
-            </a:r>
+                <a:latin typeface="Calibri" pitchFamily="34" charset="0"/>
+                <a:ea typeface="Calibri" pitchFamily="34" charset="-122"/>
+                <a:cs typeface="Calibri" pitchFamily="34" charset="-120"/>
+              </a:rPr>
+              <a:t>depth 4-5, l2_leaf_reg 8</a:t>
+            </a:r>
+            <a:endParaRPr lang="en-US" sz="1400" dirty="0"/>
+          </a:p>
+          <a:p>
+            <a:pPr marL="342900" indent="-342900">
+              <a:spcAft>
+                <a:spcPts val="600"/>
+              </a:spcAft>
+              <a:buSzPct val="100000"/>
+              <a:buChar char="•"/>
+            </a:pPr>
+            <a:r>
+              <a:rPr lang="en-US" sz="1400" dirty="0">
+                <a:solidFill>
+                  <a:srgbClr val="0B1F3A"/>
+                </a:solidFill>
+                <a:latin typeface="Calibri" pitchFamily="34" charset="0"/>
+                <a:ea typeface="Calibri" pitchFamily="34" charset="-122"/>
+                <a:cs typeface="Calibri" pitchFamily="34" charset="-120"/>
+              </a:rPr>
+              <a:t>learning_rate 0.03</a:t>
+            </a:r>
+            <a:endParaRPr lang="en-US" sz="1400" dirty="0"/>
           </a:p>
         </p:txBody>
       </p:sp>
@@ -7402,40 +7546,40 @@
               </a:spcAft>
               <a:buSzPct val="100000"/>
               <a:buChar char="•"/>
-              <a:defRPr sz="1100">
+            </a:pPr>
+            <a:r>
+              <a:rPr lang="en-US" sz="1400" dirty="0">
                 <a:solidFill>
                   <a:srgbClr val="0B1F3A"/>
                 </a:solidFill>
-              </a:defRPr>
-            </a:pPr>
-            <a:r>
-              <a:t>Run 12: L2=14.0, Balanced</a:t>
+                <a:latin typeface="Calibri" pitchFamily="34" charset="0"/>
+                <a:ea typeface="Calibri" pitchFamily="34" charset="-122"/>
+                <a:cs typeface="Calibri" pitchFamily="34" charset="-120"/>
+              </a:rPr>
+              <a:t>rsm = 0.75</a:t>
             </a:r>
             <a:endParaRPr lang="en-US" sz="1400" dirty="0"/>
           </a:p>
           <a:p>
-            <a:pPr>
-              <a:defRPr sz="1100">
+            <a:pPr marL="342900" indent="-342900">
+              <a:spcAft>
+                <a:spcPts val="600"/>
+              </a:spcAft>
+              <a:buSzPct val="100000"/>
+              <a:buChar char="•"/>
+            </a:pPr>
+            <a:r>
+              <a:rPr lang="en-US" sz="1400" dirty="0">
                 <a:solidFill>
                   <a:srgbClr val="0B1F3A"/>
                 </a:solidFill>
-              </a:defRPr>
-            </a:pPr>
-            <a:r>
-              <a:t>Sep Margin: 0.3683 (+18%)</a:t>
-            </a:r>
-          </a:p>
-          <a:p>
-            <a:pPr>
-              <a:defRPr sz="1100" b="1">
-                <a:solidFill>
-                  <a:srgbClr val="B45309"/>
-                </a:solidFill>
-              </a:defRPr>
-            </a:pPr>
-            <a:r>
-              <a:t>Brake @ Run 15: Gain &lt; 0.001</a:t>
-            </a:r>
+                <a:latin typeface="Calibri" pitchFamily="34" charset="0"/>
+                <a:ea typeface="Calibri" pitchFamily="34" charset="-122"/>
+                <a:cs typeface="Calibri" pitchFamily="34" charset="-120"/>
+              </a:rPr>
+              <a:t>Stop if gain &lt; 0.001</a:t>
+            </a:r>
+            <a:endParaRPr lang="en-US" sz="1400" dirty="0"/>
           </a:p>
         </p:txBody>
       </p:sp>
@@ -7529,7 +7673,46 @@
         <p:txBody>
           <a:bodyPr wrap="square" lIns="127000" tIns="127000" rIns="127000" bIns="127000" rtlCol="0" anchor="ctr"/>
           <a:lstStyle/>
-          <a:p/>
+          <a:p>
+            <a:pPr marL="0" indent="0" algn="ctr">
+              <a:buNone/>
+              <a:defRPr b="1"/>
+            </a:pPr>
+            <a:r>
+              <a:t>RUN LOG &amp; TOURNAMENT BENCHMARK (RESULTS.md)</a:t>
+            </a:r>
+            <a:endParaRPr lang="en-US" sz="1400" dirty="0"/>
+          </a:p>
+          <a:p>
+            <a:r>
+              <a:t>Run 01 | CatBoost Baseline | Depth 6, L2 3.0, LR 0.05, Unweighted | 0.84974 ROC | 11.27% Overfit</a:t>
+            </a:r>
+          </a:p>
+          <a:p>
+            <a:r>
+              <a:t>Run 02 | LightGBM          | Depth 6, L2 3.0, LR 0.05, Leaf-Wise  | 0.84845 ROC | 18.98% Overfit (1.4s fit)</a:t>
+            </a:r>
+          </a:p>
+          <a:p>
+            <a:r>
+              <a:t>Run 03 | XGBoost           | Depth 6, L2 3.0, LR 0.05, Taylor     | 0.84879 ROC | 19.92% Overfit (2.3s fit)</a:t>
+            </a:r>
+          </a:p>
+          <a:p>
+            <a:r>
+              <a:t>Run 04 | Random Forest     | Depth 8, Trees 300, Bagging          | 0.84728 ROC | 39.73% Overfit (Memory trap)</a:t>
+            </a:r>
+          </a:p>
+          <a:p>
+            <a:r>
+              <a:t>Run 05 | Logistic Reg      | L-BFGS, C=1.0, L2 Penalty            | 0.84681 ROC |  8.33% Overfit (Fastest 0.6s)</a:t>
+            </a:r>
+          </a:p>
+          <a:p>
+            <a:r>
+              <a:t>Run 12 | CatBoost CHAMPION | Depth 5, L2 14.0 (+366%), Balanced   | 0.85058 ROC |  6.88% Overfit (Holdout: 0.8443)</a:t>
+            </a:r>
+          </a:p>
         </p:txBody>
       </p:sp>
       <p:sp>
@@ -7580,854 +7763,6 @@
           </a:p>
         </p:txBody>
       </p:sp>
-      <p:graphicFrame>
-        <p:nvGraphicFramePr>
-          <p:cNvPr id="26" name="Table 25"/>
-          <p:cNvGraphicFramePr>
-            <a:graphicFrameLocks noGrp="1"/>
-          </p:cNvGraphicFramePr>
-          <p:nvPr/>
-        </p:nvGraphicFramePr>
-        <p:xfrm>
-          <a:off x="548640" y="4370832"/>
-          <a:ext cx="11109960" cy="1691640"/>
-        </p:xfrm>
-        <a:graphic>
-          <a:graphicData uri="http://schemas.openxmlformats.org/drawingml/2006/table">
-            <a:tbl>
-              <a:tblPr firstRow="1" bandRow="1">
-                <a:tableStyleId>{5C22544A-7EE6-4342-B048-85BDC9FD1C3A}</a:tableStyleId>
-              </a:tblPr>
-              <a:tblGrid>
-                <a:gridCol w="1005840"/>
-                <a:gridCol w="2468880"/>
-                <a:gridCol w="4343400"/>
-                <a:gridCol w="1645920"/>
-                <a:gridCol w="1645920"/>
-              </a:tblGrid>
-              <a:tr h="241662">
-                <a:tc>
-                  <a:txBody>
-                    <a:bodyPr/>
-                    <a:lstStyle/>
-                    <a:p>
-                      <a:pPr algn="ctr">
-                        <a:defRPr sz="900" b="1">
-                          <a:solidFill>
-                            <a:srgbClr val="0F766E"/>
-                          </a:solidFill>
-                        </a:defRPr>
-                      </a:pPr>
-                      <a:r>
-                        <a:t>Run</a:t>
-                      </a:r>
-                    </a:p>
-                  </a:txBody>
-                  <a:tcPr>
-                    <a:solidFill>
-                      <a:srgbClr val="F1F5F9"/>
-                    </a:solidFill>
-                  </a:tcPr>
-                </a:tc>
-                <a:tc>
-                  <a:txBody>
-                    <a:bodyPr/>
-                    <a:lstStyle/>
-                    <a:p>
-                      <a:pPr algn="l">
-                        <a:defRPr sz="900" b="1">
-                          <a:solidFill>
-                            <a:srgbClr val="0F766E"/>
-                          </a:solidFill>
-                        </a:defRPr>
-                      </a:pPr>
-                      <a:r>
-                        <a:t>Architecture</a:t>
-                      </a:r>
-                    </a:p>
-                  </a:txBody>
-                  <a:tcPr>
-                    <a:solidFill>
-                      <a:srgbClr val="F1F5F9"/>
-                    </a:solidFill>
-                  </a:tcPr>
-                </a:tc>
-                <a:tc>
-                  <a:txBody>
-                    <a:bodyPr/>
-                    <a:lstStyle/>
-                    <a:p>
-                      <a:pPr algn="l">
-                        <a:defRPr sz="900" b="1">
-                          <a:solidFill>
-                            <a:srgbClr val="0F766E"/>
-                          </a:solidFill>
-                        </a:defRPr>
-                      </a:pPr>
-                      <a:r>
-                        <a:t>Key Hyperparameters (RESULTS.md)</a:t>
-                      </a:r>
-                    </a:p>
-                  </a:txBody>
-                  <a:tcPr>
-                    <a:solidFill>
-                      <a:srgbClr val="F1F5F9"/>
-                    </a:solidFill>
-                  </a:tcPr>
-                </a:tc>
-                <a:tc>
-                  <a:txBody>
-                    <a:bodyPr/>
-                    <a:lstStyle/>
-                    <a:p>
-                      <a:pPr algn="ctr">
-                        <a:defRPr sz="900" b="1">
-                          <a:solidFill>
-                            <a:srgbClr val="0F766E"/>
-                          </a:solidFill>
-                        </a:defRPr>
-                      </a:pPr>
-                      <a:r>
-                        <a:t>5-Fold OOF ROC</a:t>
-                      </a:r>
-                    </a:p>
-                  </a:txBody>
-                  <a:tcPr>
-                    <a:solidFill>
-                      <a:srgbClr val="F1F5F9"/>
-                    </a:solidFill>
-                  </a:tcPr>
-                </a:tc>
-                <a:tc>
-                  <a:txBody>
-                    <a:bodyPr/>
-                    <a:lstStyle/>
-                    <a:p>
-                      <a:pPr algn="ctr">
-                        <a:defRPr sz="900" b="1">
-                          <a:solidFill>
-                            <a:srgbClr val="0F766E"/>
-                          </a:solidFill>
-                        </a:defRPr>
-                      </a:pPr>
-                      <a:r>
-                        <a:t>Overfit Index (Ω)</a:t>
-                      </a:r>
-                    </a:p>
-                  </a:txBody>
-                  <a:tcPr>
-                    <a:solidFill>
-                      <a:srgbClr val="F1F5F9"/>
-                    </a:solidFill>
-                  </a:tcPr>
-                </a:tc>
-              </a:tr>
-              <a:tr h="241662">
-                <a:tc>
-                  <a:txBody>
-                    <a:bodyPr/>
-                    <a:lstStyle/>
-                    <a:p>
-                      <a:pPr algn="ctr">
-                        <a:defRPr sz="850" b="0">
-                          <a:solidFill>
-                            <a:srgbClr val="0B1F3A"/>
-                          </a:solidFill>
-                        </a:defRPr>
-                      </a:pPr>
-                      <a:r>
-                        <a:t>Run 01</a:t>
-                      </a:r>
-                    </a:p>
-                  </a:txBody>
-                  <a:tcPr>
-                    <a:solidFill>
-                      <a:srgbClr val="FFFFFF"/>
-                    </a:solidFill>
-                  </a:tcPr>
-                </a:tc>
-                <a:tc>
-                  <a:txBody>
-                    <a:bodyPr/>
-                    <a:lstStyle/>
-                    <a:p>
-                      <a:pPr algn="l">
-                        <a:defRPr sz="850" b="0">
-                          <a:solidFill>
-                            <a:srgbClr val="0B1F3A"/>
-                          </a:solidFill>
-                        </a:defRPr>
-                      </a:pPr>
-                      <a:r>
-                        <a:t>CatBoost Baseline</a:t>
-                      </a:r>
-                    </a:p>
-                  </a:txBody>
-                  <a:tcPr>
-                    <a:solidFill>
-                      <a:srgbClr val="FFFFFF"/>
-                    </a:solidFill>
-                  </a:tcPr>
-                </a:tc>
-                <a:tc>
-                  <a:txBody>
-                    <a:bodyPr/>
-                    <a:lstStyle/>
-                    <a:p>
-                      <a:pPr algn="l">
-                        <a:defRPr sz="850" b="0">
-                          <a:solidFill>
-                            <a:srgbClr val="0B1F3A"/>
-                          </a:solidFill>
-                        </a:defRPr>
-                      </a:pPr>
-                      <a:r>
-                        <a:t>Depth 6, L2 3.0, LR 0.05, Unweighted</a:t>
-                      </a:r>
-                    </a:p>
-                  </a:txBody>
-                  <a:tcPr>
-                    <a:solidFill>
-                      <a:srgbClr val="FFFFFF"/>
-                    </a:solidFill>
-                  </a:tcPr>
-                </a:tc>
-                <a:tc>
-                  <a:txBody>
-                    <a:bodyPr/>
-                    <a:lstStyle/>
-                    <a:p>
-                      <a:pPr algn="ctr">
-                        <a:defRPr sz="850" b="0">
-                          <a:solidFill>
-                            <a:srgbClr val="0B1F3A"/>
-                          </a:solidFill>
-                        </a:defRPr>
-                      </a:pPr>
-                      <a:r>
-                        <a:t>0.84974</a:t>
-                      </a:r>
-                    </a:p>
-                  </a:txBody>
-                  <a:tcPr>
-                    <a:solidFill>
-                      <a:srgbClr val="FFFFFF"/>
-                    </a:solidFill>
-                  </a:tcPr>
-                </a:tc>
-                <a:tc>
-                  <a:txBody>
-                    <a:bodyPr/>
-                    <a:lstStyle/>
-                    <a:p>
-                      <a:pPr algn="ctr">
-                        <a:defRPr sz="850" b="0">
-                          <a:solidFill>
-                            <a:srgbClr val="0B1F3A"/>
-                          </a:solidFill>
-                        </a:defRPr>
-                      </a:pPr>
-                      <a:r>
-                        <a:t>11.27% (Gen Gap: 0.046)</a:t>
-                      </a:r>
-                    </a:p>
-                  </a:txBody>
-                  <a:tcPr>
-                    <a:solidFill>
-                      <a:srgbClr val="FFFFFF"/>
-                    </a:solidFill>
-                  </a:tcPr>
-                </a:tc>
-              </a:tr>
-              <a:tr h="241662">
-                <a:tc>
-                  <a:txBody>
-                    <a:bodyPr/>
-                    <a:lstStyle/>
-                    <a:p>
-                      <a:pPr algn="ctr">
-                        <a:defRPr sz="850" b="0">
-                          <a:solidFill>
-                            <a:srgbClr val="0B1F3A"/>
-                          </a:solidFill>
-                        </a:defRPr>
-                      </a:pPr>
-                      <a:r>
-                        <a:t>Run 02</a:t>
-                      </a:r>
-                    </a:p>
-                  </a:txBody>
-                  <a:tcPr>
-                    <a:solidFill>
-                      <a:srgbClr val="FFFFFF"/>
-                    </a:solidFill>
-                  </a:tcPr>
-                </a:tc>
-                <a:tc>
-                  <a:txBody>
-                    <a:bodyPr/>
-                    <a:lstStyle/>
-                    <a:p>
-                      <a:pPr algn="l">
-                        <a:defRPr sz="850" b="0">
-                          <a:solidFill>
-                            <a:srgbClr val="0B1F3A"/>
-                          </a:solidFill>
-                        </a:defRPr>
-                      </a:pPr>
-                      <a:r>
-                        <a:t>LightGBM</a:t>
-                      </a:r>
-                    </a:p>
-                  </a:txBody>
-                  <a:tcPr>
-                    <a:solidFill>
-                      <a:srgbClr val="FFFFFF"/>
-                    </a:solidFill>
-                  </a:tcPr>
-                </a:tc>
-                <a:tc>
-                  <a:txBody>
-                    <a:bodyPr/>
-                    <a:lstStyle/>
-                    <a:p>
-                      <a:pPr algn="l">
-                        <a:defRPr sz="850" b="0">
-                          <a:solidFill>
-                            <a:srgbClr val="0B1F3A"/>
-                          </a:solidFill>
-                        </a:defRPr>
-                      </a:pPr>
-                      <a:r>
-                        <a:t>Depth 6, L2 3.0, LR 0.05, Leaf-Wise (1.4s)</a:t>
-                      </a:r>
-                    </a:p>
-                  </a:txBody>
-                  <a:tcPr>
-                    <a:solidFill>
-                      <a:srgbClr val="FFFFFF"/>
-                    </a:solidFill>
-                  </a:tcPr>
-                </a:tc>
-                <a:tc>
-                  <a:txBody>
-                    <a:bodyPr/>
-                    <a:lstStyle/>
-                    <a:p>
-                      <a:pPr algn="ctr">
-                        <a:defRPr sz="850" b="0">
-                          <a:solidFill>
-                            <a:srgbClr val="0B1F3A"/>
-                          </a:solidFill>
-                        </a:defRPr>
-                      </a:pPr>
-                      <a:r>
-                        <a:t>0.84845</a:t>
-                      </a:r>
-                    </a:p>
-                  </a:txBody>
-                  <a:tcPr>
-                    <a:solidFill>
-                      <a:srgbClr val="FFFFFF"/>
-                    </a:solidFill>
-                  </a:tcPr>
-                </a:tc>
-                <a:tc>
-                  <a:txBody>
-                    <a:bodyPr/>
-                    <a:lstStyle/>
-                    <a:p>
-                      <a:pPr algn="ctr">
-                        <a:defRPr sz="850" b="0">
-                          <a:solidFill>
-                            <a:srgbClr val="0B1F3A"/>
-                          </a:solidFill>
-                        </a:defRPr>
-                      </a:pPr>
-                      <a:r>
-                        <a:t>18.98% (Gen Gap: 0.079)</a:t>
-                      </a:r>
-                    </a:p>
-                  </a:txBody>
-                  <a:tcPr>
-                    <a:solidFill>
-                      <a:srgbClr val="FFFFFF"/>
-                    </a:solidFill>
-                  </a:tcPr>
-                </a:tc>
-              </a:tr>
-              <a:tr h="241662">
-                <a:tc>
-                  <a:txBody>
-                    <a:bodyPr/>
-                    <a:lstStyle/>
-                    <a:p>
-                      <a:pPr algn="ctr">
-                        <a:defRPr sz="850" b="0">
-                          <a:solidFill>
-                            <a:srgbClr val="0B1F3A"/>
-                          </a:solidFill>
-                        </a:defRPr>
-                      </a:pPr>
-                      <a:r>
-                        <a:t>Run 03</a:t>
-                      </a:r>
-                    </a:p>
-                  </a:txBody>
-                  <a:tcPr>
-                    <a:solidFill>
-                      <a:srgbClr val="FFFFFF"/>
-                    </a:solidFill>
-                  </a:tcPr>
-                </a:tc>
-                <a:tc>
-                  <a:txBody>
-                    <a:bodyPr/>
-                    <a:lstStyle/>
-                    <a:p>
-                      <a:pPr algn="l">
-                        <a:defRPr sz="850" b="0">
-                          <a:solidFill>
-                            <a:srgbClr val="0B1F3A"/>
-                          </a:solidFill>
-                        </a:defRPr>
-                      </a:pPr>
-                      <a:r>
-                        <a:t>XGBoost</a:t>
-                      </a:r>
-                    </a:p>
-                  </a:txBody>
-                  <a:tcPr>
-                    <a:solidFill>
-                      <a:srgbClr val="FFFFFF"/>
-                    </a:solidFill>
-                  </a:tcPr>
-                </a:tc>
-                <a:tc>
-                  <a:txBody>
-                    <a:bodyPr/>
-                    <a:lstStyle/>
-                    <a:p>
-                      <a:pPr algn="l">
-                        <a:defRPr sz="850" b="0">
-                          <a:solidFill>
-                            <a:srgbClr val="0B1F3A"/>
-                          </a:solidFill>
-                        </a:defRPr>
-                      </a:pPr>
-                      <a:r>
-                        <a:t>Depth 6, L2 3.0, LR 0.05, Taylor Tree (2.3s)</a:t>
-                      </a:r>
-                    </a:p>
-                  </a:txBody>
-                  <a:tcPr>
-                    <a:solidFill>
-                      <a:srgbClr val="FFFFFF"/>
-                    </a:solidFill>
-                  </a:tcPr>
-                </a:tc>
-                <a:tc>
-                  <a:txBody>
-                    <a:bodyPr/>
-                    <a:lstStyle/>
-                    <a:p>
-                      <a:pPr algn="ctr">
-                        <a:defRPr sz="850" b="0">
-                          <a:solidFill>
-                            <a:srgbClr val="0B1F3A"/>
-                          </a:solidFill>
-                        </a:defRPr>
-                      </a:pPr>
-                      <a:r>
-                        <a:t>0.84879</a:t>
-                      </a:r>
-                    </a:p>
-                  </a:txBody>
-                  <a:tcPr>
-                    <a:solidFill>
-                      <a:srgbClr val="FFFFFF"/>
-                    </a:solidFill>
-                  </a:tcPr>
-                </a:tc>
-                <a:tc>
-                  <a:txBody>
-                    <a:bodyPr/>
-                    <a:lstStyle/>
-                    <a:p>
-                      <a:pPr algn="ctr">
-                        <a:defRPr sz="850" b="0">
-                          <a:solidFill>
-                            <a:srgbClr val="0B1F3A"/>
-                          </a:solidFill>
-                        </a:defRPr>
-                      </a:pPr>
-                      <a:r>
-                        <a:t>19.92% (Gen Gap: 0.083)</a:t>
-                      </a:r>
-                    </a:p>
-                  </a:txBody>
-                  <a:tcPr>
-                    <a:solidFill>
-                      <a:srgbClr val="FFFFFF"/>
-                    </a:solidFill>
-                  </a:tcPr>
-                </a:tc>
-              </a:tr>
-              <a:tr h="241662">
-                <a:tc>
-                  <a:txBody>
-                    <a:bodyPr/>
-                    <a:lstStyle/>
-                    <a:p>
-                      <a:pPr algn="ctr">
-                        <a:defRPr sz="850" b="0">
-                          <a:solidFill>
-                            <a:srgbClr val="0B1F3A"/>
-                          </a:solidFill>
-                        </a:defRPr>
-                      </a:pPr>
-                      <a:r>
-                        <a:t>Run 04</a:t>
-                      </a:r>
-                    </a:p>
-                  </a:txBody>
-                  <a:tcPr>
-                    <a:solidFill>
-                      <a:srgbClr val="FFFFFF"/>
-                    </a:solidFill>
-                  </a:tcPr>
-                </a:tc>
-                <a:tc>
-                  <a:txBody>
-                    <a:bodyPr/>
-                    <a:lstStyle/>
-                    <a:p>
-                      <a:pPr algn="l">
-                        <a:defRPr sz="850" b="0">
-                          <a:solidFill>
-                            <a:srgbClr val="0B1F3A"/>
-                          </a:solidFill>
-                        </a:defRPr>
-                      </a:pPr>
-                      <a:r>
-                        <a:t>Random Forest</a:t>
-                      </a:r>
-                    </a:p>
-                  </a:txBody>
-                  <a:tcPr>
-                    <a:solidFill>
-                      <a:srgbClr val="FFFFFF"/>
-                    </a:solidFill>
-                  </a:tcPr>
-                </a:tc>
-                <a:tc>
-                  <a:txBody>
-                    <a:bodyPr/>
-                    <a:lstStyle/>
-                    <a:p>
-                      <a:pPr algn="l">
-                        <a:defRPr sz="850" b="0">
-                          <a:solidFill>
-                            <a:srgbClr val="0B1F3A"/>
-                          </a:solidFill>
-                        </a:defRPr>
-                      </a:pPr>
-                      <a:r>
-                        <a:t>Depth 8, 300 Trees, Bagging (7.1s)</a:t>
-                      </a:r>
-                    </a:p>
-                  </a:txBody>
-                  <a:tcPr>
-                    <a:solidFill>
-                      <a:srgbClr val="FFFFFF"/>
-                    </a:solidFill>
-                  </a:tcPr>
-                </a:tc>
-                <a:tc>
-                  <a:txBody>
-                    <a:bodyPr/>
-                    <a:lstStyle/>
-                    <a:p>
-                      <a:pPr algn="ctr">
-                        <a:defRPr sz="850" b="0">
-                          <a:solidFill>
-                            <a:srgbClr val="0B1F3A"/>
-                          </a:solidFill>
-                        </a:defRPr>
-                      </a:pPr>
-                      <a:r>
-                        <a:t>0.84728</a:t>
-                      </a:r>
-                    </a:p>
-                  </a:txBody>
-                  <a:tcPr>
-                    <a:solidFill>
-                      <a:srgbClr val="FFFFFF"/>
-                    </a:solidFill>
-                  </a:tcPr>
-                </a:tc>
-                <a:tc>
-                  <a:txBody>
-                    <a:bodyPr/>
-                    <a:lstStyle/>
-                    <a:p>
-                      <a:pPr algn="ctr">
-                        <a:defRPr sz="850" b="0">
-                          <a:solidFill>
-                            <a:srgbClr val="0B1F3A"/>
-                          </a:solidFill>
-                        </a:defRPr>
-                      </a:pPr>
-                      <a:r>
-                        <a:t>39.73% (Memorization trap)</a:t>
-                      </a:r>
-                    </a:p>
-                  </a:txBody>
-                  <a:tcPr>
-                    <a:solidFill>
-                      <a:srgbClr val="FFFFFF"/>
-                    </a:solidFill>
-                  </a:tcPr>
-                </a:tc>
-              </a:tr>
-              <a:tr h="241662">
-                <a:tc>
-                  <a:txBody>
-                    <a:bodyPr/>
-                    <a:lstStyle/>
-                    <a:p>
-                      <a:pPr algn="ctr">
-                        <a:defRPr sz="850" b="0">
-                          <a:solidFill>
-                            <a:srgbClr val="0B1F3A"/>
-                          </a:solidFill>
-                        </a:defRPr>
-                      </a:pPr>
-                      <a:r>
-                        <a:t>Run 05</a:t>
-                      </a:r>
-                    </a:p>
-                  </a:txBody>
-                  <a:tcPr>
-                    <a:solidFill>
-                      <a:srgbClr val="FFFFFF"/>
-                    </a:solidFill>
-                  </a:tcPr>
-                </a:tc>
-                <a:tc>
-                  <a:txBody>
-                    <a:bodyPr/>
-                    <a:lstStyle/>
-                    <a:p>
-                      <a:pPr algn="l">
-                        <a:defRPr sz="850" b="0">
-                          <a:solidFill>
-                            <a:srgbClr val="0B1F3A"/>
-                          </a:solidFill>
-                        </a:defRPr>
-                      </a:pPr>
-                      <a:r>
-                        <a:t>Logistic Regression</a:t>
-                      </a:r>
-                    </a:p>
-                  </a:txBody>
-                  <a:tcPr>
-                    <a:solidFill>
-                      <a:srgbClr val="FFFFFF"/>
-                    </a:solidFill>
-                  </a:tcPr>
-                </a:tc>
-                <a:tc>
-                  <a:txBody>
-                    <a:bodyPr/>
-                    <a:lstStyle/>
-                    <a:p>
-                      <a:pPr algn="l">
-                        <a:defRPr sz="850" b="0">
-                          <a:solidFill>
-                            <a:srgbClr val="0B1F3A"/>
-                          </a:solidFill>
-                        </a:defRPr>
-                      </a:pPr>
-                      <a:r>
-                        <a:t>L-BFGS, C=1.0, L2 Reg (Fastest: 0.6s)</a:t>
-                      </a:r>
-                    </a:p>
-                  </a:txBody>
-                  <a:tcPr>
-                    <a:solidFill>
-                      <a:srgbClr val="FFFFFF"/>
-                    </a:solidFill>
-                  </a:tcPr>
-                </a:tc>
-                <a:tc>
-                  <a:txBody>
-                    <a:bodyPr/>
-                    <a:lstStyle/>
-                    <a:p>
-                      <a:pPr algn="ctr">
-                        <a:defRPr sz="850" b="0">
-                          <a:solidFill>
-                            <a:srgbClr val="0B1F3A"/>
-                          </a:solidFill>
-                        </a:defRPr>
-                      </a:pPr>
-                      <a:r>
-                        <a:t>0.84681</a:t>
-                      </a:r>
-                    </a:p>
-                  </a:txBody>
-                  <a:tcPr>
-                    <a:solidFill>
-                      <a:srgbClr val="FFFFFF"/>
-                    </a:solidFill>
-                  </a:tcPr>
-                </a:tc>
-                <a:tc>
-                  <a:txBody>
-                    <a:bodyPr/>
-                    <a:lstStyle/>
-                    <a:p>
-                      <a:pPr algn="ctr">
-                        <a:defRPr sz="850" b="0">
-                          <a:solidFill>
-                            <a:srgbClr val="0B1F3A"/>
-                          </a:solidFill>
-                        </a:defRPr>
-                      </a:pPr>
-                      <a:r>
-                        <a:t>8.33% (Linear baseline)</a:t>
-                      </a:r>
-                    </a:p>
-                  </a:txBody>
-                  <a:tcPr>
-                    <a:solidFill>
-                      <a:srgbClr val="FFFFFF"/>
-                    </a:solidFill>
-                  </a:tcPr>
-                </a:tc>
-              </a:tr>
-              <a:tr h="241668">
-                <a:tc>
-                  <a:txBody>
-                    <a:bodyPr/>
-                    <a:lstStyle/>
-                    <a:p>
-                      <a:pPr algn="ctr">
-                        <a:defRPr sz="850" b="1">
-                          <a:solidFill>
-                            <a:srgbClr val="DC2626"/>
-                          </a:solidFill>
-                        </a:defRPr>
-                      </a:pPr>
-                      <a:r>
-                        <a:t>Run 12</a:t>
-                      </a:r>
-                    </a:p>
-                  </a:txBody>
-                  <a:tcPr>
-                    <a:solidFill>
-                      <a:srgbClr val="FEF2F2"/>
-                    </a:solidFill>
-                  </a:tcPr>
-                </a:tc>
-                <a:tc>
-                  <a:txBody>
-                    <a:bodyPr/>
-                    <a:lstStyle/>
-                    <a:p>
-                      <a:pPr algn="l">
-                        <a:defRPr sz="850" b="1">
-                          <a:solidFill>
-                            <a:srgbClr val="DC2626"/>
-                          </a:solidFill>
-                        </a:defRPr>
-                      </a:pPr>
-                      <a:r>
-                        <a:t>CatBoost Champion ★</a:t>
-                      </a:r>
-                    </a:p>
-                  </a:txBody>
-                  <a:tcPr>
-                    <a:solidFill>
-                      <a:srgbClr val="FEF2F2"/>
-                    </a:solidFill>
-                  </a:tcPr>
-                </a:tc>
-                <a:tc>
-                  <a:txBody>
-                    <a:bodyPr/>
-                    <a:lstStyle/>
-                    <a:p>
-                      <a:pPr algn="l">
-                        <a:defRPr sz="850" b="1">
-                          <a:solidFill>
-                            <a:srgbClr val="DC2626"/>
-                          </a:solidFill>
-                        </a:defRPr>
-                      </a:pPr>
-                      <a:r>
-                        <a:t>Depth 5, L2 14.0 (+366%), Balanced mode</a:t>
-                      </a:r>
-                    </a:p>
-                  </a:txBody>
-                  <a:tcPr>
-                    <a:solidFill>
-                      <a:srgbClr val="FEF2F2"/>
-                    </a:solidFill>
-                  </a:tcPr>
-                </a:tc>
-                <a:tc>
-                  <a:txBody>
-                    <a:bodyPr/>
-                    <a:lstStyle/>
-                    <a:p>
-                      <a:pPr algn="ctr">
-                        <a:defRPr sz="850" b="1">
-                          <a:solidFill>
-                            <a:srgbClr val="DC2626"/>
-                          </a:solidFill>
-                        </a:defRPr>
-                      </a:pPr>
-                      <a:r>
-                        <a:t>0.85058</a:t>
-                      </a:r>
-                    </a:p>
-                  </a:txBody>
-                  <a:tcPr>
-                    <a:solidFill>
-                      <a:srgbClr val="FEF2F2"/>
-                    </a:solidFill>
-                  </a:tcPr>
-                </a:tc>
-                <a:tc>
-                  <a:txBody>
-                    <a:bodyPr/>
-                    <a:lstStyle/>
-                    <a:p>
-                      <a:pPr algn="ctr">
-                        <a:defRPr sz="850" b="1">
-                          <a:solidFill>
-                            <a:srgbClr val="DC2626"/>
-                          </a:solidFill>
-                        </a:defRPr>
-                      </a:pPr>
-                      <a:r>
-                        <a:t>6.88% (Holdout: 0.84426)</a:t>
-                      </a:r>
-                    </a:p>
-                  </a:txBody>
-                  <a:tcPr>
-                    <a:solidFill>
-                      <a:srgbClr val="FEF2F2"/>
-                    </a:solidFill>
-                  </a:tcPr>
-                </a:tc>
-              </a:tr>
-            </a:tbl>
-          </a:graphicData>
-        </a:graphic>
-      </p:graphicFrame>
     </p:spTree>
   </p:cSld>
   <p:clrMapOvr>
@@ -8438,7 +7773,23 @@
 
 <file path=ppt/slides/slide7.xml><?xml version="1.0" encoding="utf-8"?>
 <p:sld xmlns:a="http://schemas.openxmlformats.org/drawingml/2006/main" xmlns:r="http://schemas.openxmlformats.org/officeDocument/2006/relationships" xmlns:p="http://schemas.openxmlformats.org/presentationml/2006/main">
+  <p:bg>
+    <p:bgPr>
+      <a:solidFill>
+        <a:srgbClr val="FAF6EE"/>
+      </a:solidFill>
+      <a:effectLst/>
+    </p:bgPr>
+  </p:bg>
   <p:cSld name="Slide 7">
+    <p:bg>
+      <p:bgPr>
+        <a:solidFill>
+          <a:srgbClr val="FAF6EE"/>
+        </a:solidFill>
+        <a:effectLst/>
+      </p:bgPr>
+    </p:bg>
     <p:spTree>
       <p:nvGrpSpPr>
         <p:cNvPr id="1" name=""/>
@@ -9615,7 +8966,23 @@
 
 <file path=ppt/slides/slide8.xml><?xml version="1.0" encoding="utf-8"?>
 <p:sld xmlns:a="http://schemas.openxmlformats.org/drawingml/2006/main" xmlns:r="http://schemas.openxmlformats.org/officeDocument/2006/relationships" xmlns:p="http://schemas.openxmlformats.org/presentationml/2006/main">
+  <p:bg>
+    <p:bgPr>
+      <a:solidFill>
+        <a:srgbClr val="FAF6EE"/>
+      </a:solidFill>
+      <a:effectLst/>
+    </p:bgPr>
+  </p:bg>
   <p:cSld name="Slide 8">
+    <p:bg>
+      <p:bgPr>
+        <a:solidFill>
+          <a:srgbClr val="FAF6EE"/>
+        </a:solidFill>
+        <a:effectLst/>
+      </p:bgPr>
+    </p:bg>
     <p:spTree>
       <p:nvGrpSpPr>
         <p:cNvPr id="1" name=""/>
@@ -10045,16 +9412,25 @@
                     <a:bodyPr/>
                     <a:lstStyle/>
                     <a:p>
-                      <a:pPr>
-                        <a:defRPr sz="1050">
+                      <a:pPr marL="0" indent="0" algn="l">
+                        <a:buNone/>
+                      </a:pPr>
+                      <a:r>
+                        <a:rPr lang="en-US" sz="1300" b="1" dirty="0">
                           <a:solidFill>
                             <a:srgbClr val="0B1F3A"/>
                           </a:solidFill>
-                        </a:defRPr>
-                      </a:pPr>
-                      <a:r>
+                          <a:latin typeface="Courier New" pitchFamily="34" charset="0"/>
+                          <a:ea typeface="Courier New" pitchFamily="34" charset="-122"/>
+                          <a:cs typeface="Courier New" pitchFamily="34" charset="-120"/>
+                        </a:rPr>
                         <a:t>Logistic Regression</a:t>
                       </a:r>
+                      <a:endParaRPr lang="en-US" sz="1300" dirty="0">
+                        <a:latin typeface="Courier New" charset="0"/>
+                        <a:ea typeface="Courier New" charset="0"/>
+                        <a:cs typeface="Courier New" charset="0"/>
+                      </a:endParaRPr>
                     </a:p>
                   </a:txBody>
                   <a:tcPr anchor="ctr">
@@ -10104,13 +9480,6 @@
                     <a:bodyPr/>
                     <a:lstStyle/>
                     <a:p>
-                      <a:pPr>
-                        <a:defRPr sz="1050">
-                          <a:solidFill>
-                            <a:srgbClr val="0B1F3A"/>
-                          </a:solidFill>
-                        </a:defRPr>
-                      </a:pPr>
                       <a:r>
                         <a:t>0.8468</a:t>
                       </a:r>
@@ -10163,13 +9532,6 @@
                     <a:bodyPr/>
                     <a:lstStyle/>
                     <a:p>
-                      <a:pPr>
-                        <a:defRPr sz="1050">
-                          <a:solidFill>
-                            <a:srgbClr val="0B1F3A"/>
-                          </a:solidFill>
-                        </a:defRPr>
-                      </a:pPr>
                       <a:r>
                         <a:t>0.6603</a:t>
                       </a:r>
@@ -10222,16 +9584,25 @@
                     <a:bodyPr/>
                     <a:lstStyle/>
                     <a:p>
-                      <a:pPr>
-                        <a:defRPr sz="1050">
+                      <a:pPr marL="0" indent="0" algn="ctr">
+                        <a:buNone/>
+                      </a:pPr>
+                      <a:r>
+                        <a:rPr lang="en-US" sz="1400" dirty="0">
                           <a:solidFill>
                             <a:srgbClr val="0B1F3A"/>
                           </a:solidFill>
-                        </a:defRPr>
-                      </a:pPr>
-                      <a:r>
-                        <a:t>about 0.80 (0.6s fit)</a:t>
+                          <a:latin typeface="Calibri" pitchFamily="34" charset="0"/>
+                          <a:ea typeface="Calibri" pitchFamily="34" charset="-122"/>
+                          <a:cs typeface="Calibri" pitchFamily="34" charset="-120"/>
+                        </a:rPr>
+                        <a:t>about 0.80</a:t>
                       </a:r>
+                      <a:endParaRPr lang="en-US" sz="1400" dirty="0">
+                        <a:latin typeface="Calibri" charset="0"/>
+                        <a:ea typeface="Calibri" charset="0"/>
+                        <a:cs typeface="Calibri" charset="0"/>
+                      </a:endParaRPr>
                     </a:p>
                   </a:txBody>
                   <a:tcPr anchor="ctr">
@@ -10288,16 +9659,25 @@
                     <a:bodyPr/>
                     <a:lstStyle/>
                     <a:p>
-                      <a:pPr>
-                        <a:defRPr sz="1050">
+                      <a:pPr marL="0" indent="0" algn="l">
+                        <a:buNone/>
+                      </a:pPr>
+                      <a:r>
+                        <a:rPr lang="en-US" sz="1300" b="1" dirty="0">
                           <a:solidFill>
                             <a:srgbClr val="0B1F3A"/>
                           </a:solidFill>
-                        </a:defRPr>
-                      </a:pPr>
-                      <a:r>
+                          <a:latin typeface="Courier New" pitchFamily="34" charset="0"/>
+                          <a:ea typeface="Courier New" pitchFamily="34" charset="-122"/>
+                          <a:cs typeface="Courier New" pitchFamily="34" charset="-120"/>
+                        </a:rPr>
                         <a:t>XGBoost</a:t>
                       </a:r>
+                      <a:endParaRPr lang="en-US" sz="1300" dirty="0">
+                        <a:latin typeface="Courier New" charset="0"/>
+                        <a:ea typeface="Courier New" charset="0"/>
+                        <a:cs typeface="Courier New" charset="0"/>
+                      </a:endParaRPr>
                     </a:p>
                   </a:txBody>
                   <a:tcPr anchor="ctr">
@@ -10347,13 +9727,6 @@
                     <a:bodyPr/>
                     <a:lstStyle/>
                     <a:p>
-                      <a:pPr>
-                        <a:defRPr sz="1050">
-                          <a:solidFill>
-                            <a:srgbClr val="0B1F3A"/>
-                          </a:solidFill>
-                        </a:defRPr>
-                      </a:pPr>
                       <a:r>
                         <a:t>0.8488</a:t>
                       </a:r>
@@ -10406,13 +9779,6 @@
                     <a:bodyPr/>
                     <a:lstStyle/>
                     <a:p>
-                      <a:pPr>
-                        <a:defRPr sz="1050">
-                          <a:solidFill>
-                            <a:srgbClr val="0B1F3A"/>
-                          </a:solidFill>
-                        </a:defRPr>
-                      </a:pPr>
                       <a:r>
                         <a:t>0.6630</a:t>
                       </a:r>
@@ -10465,16 +9831,25 @@
                     <a:bodyPr/>
                     <a:lstStyle/>
                     <a:p>
-                      <a:pPr>
-                        <a:defRPr sz="1050">
+                      <a:pPr marL="0" indent="0" algn="ctr">
+                        <a:buNone/>
+                      </a:pPr>
+                      <a:r>
+                        <a:rPr lang="en-US" sz="1400" dirty="0">
                           <a:solidFill>
                             <a:srgbClr val="0B1F3A"/>
                           </a:solidFill>
-                        </a:defRPr>
-                      </a:pPr>
-                      <a:r>
-                        <a:t>n/a (2.3s fit)</a:t>
+                          <a:latin typeface="Calibri" pitchFamily="34" charset="0"/>
+                          <a:ea typeface="Calibri" pitchFamily="34" charset="-122"/>
+                          <a:cs typeface="Calibri" pitchFamily="34" charset="-120"/>
+                        </a:rPr>
+                        <a:t>n/a</a:t>
                       </a:r>
+                      <a:endParaRPr lang="en-US" sz="1400" dirty="0">
+                        <a:latin typeface="Calibri" charset="0"/>
+                        <a:ea typeface="Calibri" charset="0"/>
+                        <a:cs typeface="Calibri" charset="0"/>
+                      </a:endParaRPr>
                     </a:p>
                   </a:txBody>
                   <a:tcPr anchor="ctr">
@@ -10531,16 +9906,25 @@
                     <a:bodyPr/>
                     <a:lstStyle/>
                     <a:p>
-                      <a:pPr>
-                        <a:defRPr sz="1050">
+                      <a:pPr marL="0" indent="0" algn="l">
+                        <a:buNone/>
+                      </a:pPr>
+                      <a:r>
+                        <a:rPr lang="en-US" sz="1300" b="1" dirty="0">
                           <a:solidFill>
                             <a:srgbClr val="0B1F3A"/>
                           </a:solidFill>
-                        </a:defRPr>
-                      </a:pPr>
-                      <a:r>
+                          <a:latin typeface="Courier New" pitchFamily="34" charset="0"/>
+                          <a:ea typeface="Courier New" pitchFamily="34" charset="-122"/>
+                          <a:cs typeface="Courier New" pitchFamily="34" charset="-120"/>
+                        </a:rPr>
                         <a:t>LightGBM</a:t>
                       </a:r>
+                      <a:endParaRPr lang="en-US" sz="1300" dirty="0">
+                        <a:latin typeface="Courier New" charset="0"/>
+                        <a:ea typeface="Courier New" charset="0"/>
+                        <a:cs typeface="Courier New" charset="0"/>
+                      </a:endParaRPr>
                     </a:p>
                   </a:txBody>
                   <a:tcPr anchor="ctr">
@@ -10590,13 +9974,6 @@
                     <a:bodyPr/>
                     <a:lstStyle/>
                     <a:p>
-                      <a:pPr>
-                        <a:defRPr sz="1050">
-                          <a:solidFill>
-                            <a:srgbClr val="0B1F3A"/>
-                          </a:solidFill>
-                        </a:defRPr>
-                      </a:pPr>
                       <a:r>
                         <a:t>0.8485</a:t>
                       </a:r>
@@ -10649,13 +10026,6 @@
                     <a:bodyPr/>
                     <a:lstStyle/>
                     <a:p>
-                      <a:pPr>
-                        <a:defRPr sz="1050">
-                          <a:solidFill>
-                            <a:srgbClr val="0B1F3A"/>
-                          </a:solidFill>
-                        </a:defRPr>
-                      </a:pPr>
                       <a:r>
                         <a:t>0.6627</a:t>
                       </a:r>
@@ -10708,16 +10078,25 @@
                     <a:bodyPr/>
                     <a:lstStyle/>
                     <a:p>
-                      <a:pPr>
-                        <a:defRPr sz="1050">
+                      <a:pPr marL="0" indent="0" algn="ctr">
+                        <a:buNone/>
+                      </a:pPr>
+                      <a:r>
+                        <a:rPr lang="en-US" sz="1400" dirty="0">
                           <a:solidFill>
                             <a:srgbClr val="0B1F3A"/>
                           </a:solidFill>
-                        </a:defRPr>
-                      </a:pPr>
-                      <a:r>
-                        <a:t>n/a (1.4s fit)</a:t>
+                          <a:latin typeface="Calibri" pitchFamily="34" charset="0"/>
+                          <a:ea typeface="Calibri" pitchFamily="34" charset="-122"/>
+                          <a:cs typeface="Calibri" pitchFamily="34" charset="-120"/>
+                        </a:rPr>
+                        <a:t>n/a</a:t>
                       </a:r>
+                      <a:endParaRPr lang="en-US" sz="1400" dirty="0">
+                        <a:latin typeface="Calibri" charset="0"/>
+                        <a:ea typeface="Calibri" charset="0"/>
+                        <a:cs typeface="Calibri" charset="0"/>
+                      </a:endParaRPr>
                     </a:p>
                   </a:txBody>
                   <a:tcPr anchor="ctr">
@@ -10774,16 +10153,25 @@
                     <a:bodyPr/>
                     <a:lstStyle/>
                     <a:p>
-                      <a:pPr>
-                        <a:defRPr sz="1050" b="1">
-                          <a:solidFill>
-                            <a:srgbClr val="0F766E"/>
-                          </a:solidFill>
-                        </a:defRPr>
+                      <a:pPr marL="0" indent="0" algn="l">
+                        <a:buNone/>
                       </a:pPr>
                       <a:r>
-                        <a:t>CatBoost (Run #12 Champion ★)</a:t>
+                        <a:rPr lang="en-US" sz="1300" b="1" dirty="0">
+                          <a:solidFill>
+                            <a:srgbClr val="0B1F3A"/>
+                          </a:solidFill>
+                          <a:latin typeface="Courier New" pitchFamily="34" charset="0"/>
+                          <a:ea typeface="Courier New" pitchFamily="34" charset="-122"/>
+                          <a:cs typeface="Courier New" pitchFamily="34" charset="-120"/>
+                        </a:rPr>
+                        <a:t>CatBoost (tuned)</a:t>
                       </a:r>
+                      <a:endParaRPr lang="en-US" sz="1300" dirty="0">
+                        <a:latin typeface="Courier New" charset="0"/>
+                        <a:ea typeface="Courier New" charset="0"/>
+                        <a:cs typeface="Courier New" charset="0"/>
+                      </a:endParaRPr>
                     </a:p>
                   </a:txBody>
                   <a:tcPr anchor="ctr">
@@ -10833,13 +10221,6 @@
                     <a:bodyPr/>
                     <a:lstStyle/>
                     <a:p>
-                      <a:pPr>
-                        <a:defRPr sz="1050" b="1">
-                          <a:solidFill>
-                            <a:srgbClr val="0F766E"/>
-                          </a:solidFill>
-                        </a:defRPr>
-                      </a:pPr>
                       <a:r>
                         <a:t>0.8506</a:t>
                       </a:r>
@@ -10892,13 +10273,6 @@
                     <a:bodyPr/>
                     <a:lstStyle/>
                     <a:p>
-                      <a:pPr>
-                        <a:defRPr sz="1050" b="1">
-                          <a:solidFill>
-                            <a:srgbClr val="0F766E"/>
-                          </a:solidFill>
-                        </a:defRPr>
-                      </a:pPr>
                       <a:r>
                         <a:t>0.6645</a:t>
                       </a:r>
@@ -10951,16 +10325,25 @@
                     <a:bodyPr/>
                     <a:lstStyle/>
                     <a:p>
-                      <a:pPr>
-                        <a:defRPr sz="1050" b="1">
-                          <a:solidFill>
-                            <a:srgbClr val="0F766E"/>
-                          </a:solidFill>
-                        </a:defRPr>
+                      <a:pPr marL="0" indent="0" algn="ctr">
+                        <a:buNone/>
                       </a:pPr>
                       <a:r>
-                        <a:t>0.85+ (Holdout: 0.8443)</a:t>
+                        <a:rPr lang="en-US" sz="1400" dirty="0">
+                          <a:solidFill>
+                            <a:srgbClr val="0B1F3A"/>
+                          </a:solidFill>
+                          <a:latin typeface="Calibri" pitchFamily="34" charset="0"/>
+                          <a:ea typeface="Calibri" pitchFamily="34" charset="-122"/>
+                          <a:cs typeface="Calibri" pitchFamily="34" charset="-120"/>
+                        </a:rPr>
+                        <a:t>0.85+</a:t>
                       </a:r>
+                      <a:endParaRPr lang="en-US" sz="1400" dirty="0">
+                        <a:latin typeface="Calibri" charset="0"/>
+                        <a:ea typeface="Calibri" charset="0"/>
+                        <a:cs typeface="Calibri" charset="0"/>
+                      </a:endParaRPr>
                     </a:p>
                   </a:txBody>
                   <a:tcPr anchor="ctr">
@@ -11017,16 +10400,25 @@
                     <a:bodyPr/>
                     <a:lstStyle/>
                     <a:p>
-                      <a:pPr>
-                        <a:defRPr sz="1050">
+                      <a:pPr marL="0" indent="0" algn="l">
+                        <a:buNone/>
+                      </a:pPr>
+                      <a:r>
+                        <a:rPr lang="en-US" sz="1300" b="1" dirty="0">
                           <a:solidFill>
                             <a:srgbClr val="0B1F3A"/>
                           </a:solidFill>
-                        </a:defRPr>
-                      </a:pPr>
-                      <a:r>
-                        <a:t>Weighted blend / Ensemble</a:t>
+                          <a:latin typeface="Courier New" pitchFamily="34" charset="0"/>
+                          <a:ea typeface="Courier New" pitchFamily="34" charset="-122"/>
+                          <a:cs typeface="Courier New" pitchFamily="34" charset="-120"/>
+                        </a:rPr>
+                        <a:t>Weighted blend</a:t>
                       </a:r>
+                      <a:endParaRPr lang="en-US" sz="1300" dirty="0">
+                        <a:latin typeface="Courier New" charset="0"/>
+                        <a:ea typeface="Courier New" charset="0"/>
+                        <a:cs typeface="Courier New" charset="0"/>
+                      </a:endParaRPr>
                     </a:p>
                   </a:txBody>
                   <a:tcPr anchor="ctr">
@@ -11076,13 +10468,6 @@
                     <a:bodyPr/>
                     <a:lstStyle/>
                     <a:p>
-                      <a:pPr>
-                        <a:defRPr sz="1050">
-                          <a:solidFill>
-                            <a:srgbClr val="0B1F3A"/>
-                          </a:solidFill>
-                        </a:defRPr>
-                      </a:pPr>
                       <a:r>
                         <a:t>0.8506</a:t>
                       </a:r>
@@ -11135,13 +10520,6 @@
                     <a:bodyPr/>
                     <a:lstStyle/>
                     <a:p>
-                      <a:pPr>
-                        <a:defRPr sz="1050">
-                          <a:solidFill>
-                            <a:srgbClr val="0B1F3A"/>
-                          </a:solidFill>
-                        </a:defRPr>
-                      </a:pPr>
                       <a:r>
                         <a:t>0.6660</a:t>
                       </a:r>
@@ -11194,16 +10572,25 @@
                     <a:bodyPr/>
                     <a:lstStyle/>
                     <a:p>
-                      <a:pPr>
-                        <a:defRPr sz="1050">
+                      <a:pPr marL="0" indent="0" algn="ctr">
+                        <a:buNone/>
+                      </a:pPr>
+                      <a:r>
+                        <a:rPr lang="en-US" sz="1400" dirty="0">
                           <a:solidFill>
                             <a:srgbClr val="0B1F3A"/>
                           </a:solidFill>
-                        </a:defRPr>
-                      </a:pPr>
-                      <a:r>
+                          <a:latin typeface="Calibri" pitchFamily="34" charset="0"/>
+                          <a:ea typeface="Calibri" pitchFamily="34" charset="-122"/>
+                          <a:cs typeface="Calibri" pitchFamily="34" charset="-120"/>
+                        </a:rPr>
                         <a:t>+0.003 to +0.005</a:t>
                       </a:r>
+                      <a:endParaRPr lang="en-US" sz="1400" dirty="0">
+                        <a:latin typeface="Calibri" charset="0"/>
+                        <a:ea typeface="Calibri" charset="0"/>
+                        <a:cs typeface="Calibri" charset="0"/>
+                      </a:endParaRPr>
                     </a:p>
                   </a:txBody>
                   <a:tcPr anchor="ctr">
@@ -11312,13 +10699,6 @@
           <a:bodyPr wrap="square" lIns="0" tIns="0" rIns="0" bIns="0" rtlCol="0" anchor="ctr"/>
           <a:lstStyle/>
           <a:p>
-            <a:pPr>
-              <a:defRPr sz="2800" b="1">
-                <a:solidFill>
-                  <a:srgbClr val="0F766E"/>
-                </a:solidFill>
-              </a:defRPr>
-            </a:pPr>
             <a:r>
               <a:t>15 / 15</a:t>
             </a:r>
@@ -11346,16 +10726,21 @@
           <a:bodyPr wrap="square" lIns="0" tIns="0" rIns="0" bIns="0" rtlCol="0" anchor="ctr"/>
           <a:lstStyle/>
           <a:p>
-            <a:pPr>
-              <a:defRPr sz="1200">
+            <a:pPr marL="0" indent="0">
+              <a:buNone/>
+            </a:pPr>
+            <a:r>
+              <a:rPr lang="en-US" sz="1400" dirty="0">
                 <a:solidFill>
                   <a:srgbClr val="0B1F3A"/>
                 </a:solidFill>
-              </a:defRPr>
-            </a:pPr>
-            <a:r>
-              <a:t>runs used (Eff: 1.000)</a:t>
-            </a:r>
+                <a:latin typeface="Calibri" pitchFamily="34" charset="0"/>
+                <a:ea typeface="Calibri" pitchFamily="34" charset="-122"/>
+                <a:cs typeface="Calibri" pitchFamily="34" charset="-120"/>
+              </a:rPr>
+              <a:t>runs used</a:t>
+            </a:r>
+            <a:endParaRPr lang="en-US" sz="1400" dirty="0"/>
           </a:p>
         </p:txBody>
       </p:sp>
@@ -11413,15 +10798,8 @@
           <a:bodyPr wrap="square" lIns="0" tIns="0" rIns="0" bIns="0" rtlCol="0" anchor="ctr"/>
           <a:lstStyle/>
           <a:p>
-            <a:pPr>
-              <a:defRPr sz="2600" b="1">
-                <a:solidFill>
-                  <a:srgbClr val="B45309"/>
-                </a:solidFill>
-              </a:defRPr>
-            </a:pPr>
-            <a:r>
-              <a:t>-38.9%</a:t>
+            <a:r>
+              <a:t>Optimal</a:t>
             </a:r>
           </a:p>
         </p:txBody>
@@ -11447,16 +10825,21 @@
           <a:bodyPr wrap="square" lIns="0" tIns="0" rIns="0" bIns="0" rtlCol="0" anchor="ctr"/>
           <a:lstStyle/>
           <a:p>
-            <a:pPr>
-              <a:defRPr sz="1100">
+            <a:pPr marL="0" indent="0">
+              <a:buNone/>
+            </a:pPr>
+            <a:r>
+              <a:rPr lang="en-US" sz="1400" dirty="0">
                 <a:solidFill>
                   <a:srgbClr val="0B1F3A"/>
                 </a:solidFill>
-              </a:defRPr>
-            </a:pPr>
-            <a:r>
-              <a:t>overfitting drop (Ω: 11.3%→6.9%)</a:t>
-            </a:r>
+                <a:latin typeface="Calibri" pitchFamily="34" charset="0"/>
+                <a:ea typeface="Calibri" pitchFamily="34" charset="-122"/>
+                <a:cs typeface="Calibri" pitchFamily="34" charset="-120"/>
+              </a:rPr>
+              <a:t>runs saved</a:t>
+            </a:r>
+            <a:endParaRPr lang="en-US" sz="1400" dirty="0"/>
           </a:p>
         </p:txBody>
       </p:sp>
@@ -11514,16 +10897,21 @@
           <a:bodyPr wrap="square" lIns="0" tIns="0" rIns="0" bIns="0" rtlCol="0" anchor="ctr"/>
           <a:lstStyle/>
           <a:p>
-            <a:pPr>
-              <a:defRPr sz="2600" b="1">
-                <a:solidFill>
-                  <a:srgbClr val="0F766E"/>
-                </a:solidFill>
-              </a:defRPr>
-            </a:pPr>
-            <a:r>
-              <a:t>78.9%</a:t>
-            </a:r>
+            <a:pPr marL="0" indent="0">
+              <a:buNone/>
+            </a:pPr>
+            <a:r>
+              <a:rPr lang="en-US" sz="2200" b="1" dirty="0">
+                <a:solidFill>
+                  <a:srgbClr val="1D4ED8"/>
+                </a:solidFill>
+                <a:latin typeface="Courier New" pitchFamily="34" charset="0"/>
+                <a:ea typeface="Courier New" pitchFamily="34" charset="-122"/>
+                <a:cs typeface="Courier New" pitchFamily="34" charset="-120"/>
+              </a:rPr>
+              <a:t>0 extra</a:t>
+            </a:r>
+            <a:endParaRPr lang="en-US" sz="2200" dirty="0"/>
           </a:p>
         </p:txBody>
       </p:sp>
@@ -11548,16 +10936,21 @@
           <a:bodyPr wrap="square" lIns="0" tIns="0" rIns="0" bIns="0" rtlCol="0" anchor="ctr"/>
           <a:lstStyle/>
           <a:p>
-            <a:pPr>
-              <a:defRPr sz="1100">
+            <a:pPr marL="0" indent="0">
+              <a:buNone/>
+            </a:pPr>
+            <a:r>
+              <a:rPr lang="en-US" sz="1400" dirty="0">
                 <a:solidFill>
                   <a:srgbClr val="0B1F3A"/>
                 </a:solidFill>
-              </a:defRPr>
-            </a:pPr>
-            <a:r>
-              <a:t>holdout recall (295/374 caught)</a:t>
-            </a:r>
+                <a:latin typeface="Calibri" pitchFamily="34" charset="0"/>
+                <a:ea typeface="Calibri" pitchFamily="34" charset="-122"/>
+                <a:cs typeface="Calibri" pitchFamily="34" charset="-120"/>
+              </a:rPr>
+              <a:t>runs for blending</a:t>
+            </a:r>
+            <a:endParaRPr lang="en-US" sz="1400" dirty="0"/>
           </a:p>
         </p:txBody>
       </p:sp>
@@ -11612,7 +11005,11 @@
         <p:txBody>
           <a:bodyPr wrap="square" lIns="127000" tIns="127000" rIns="127000" bIns="127000" rtlCol="0" anchor="ctr"/>
           <a:lstStyle/>
-          <a:p/>
+          <a:p>
+            <a:r>
+              <a:t>Trajectory: Steady climb from 0.8468 (Run 5) to Champion 0.8506 (Run 12). Plateau convergence brake engaged at Run 15 (Gain &lt; 0.001).</a:t>
+            </a:r>
+          </a:p>
         </p:txBody>
       </p:sp>
       <p:sp>
@@ -11663,30 +11060,6 @@
           </a:p>
         </p:txBody>
       </p:sp>
-      <p:pic>
-        <p:nvPicPr>
-          <p:cNvPr id="26" name="Picture 25" descr="chart_trajectory.png"/>
-          <p:cNvPicPr>
-            <a:picLocks noChangeAspect="1"/>
-          </p:cNvPicPr>
-          <p:nvPr/>
-        </p:nvPicPr>
-        <p:blipFill>
-          <a:blip r:embed="rId4"/>
-          <a:stretch>
-            <a:fillRect/>
-          </a:stretch>
-        </p:blipFill>
-        <p:spPr>
-          <a:xfrm>
-            <a:off x="548640" y="4846320"/>
-            <a:ext cx="11109960" cy="1280160"/>
-          </a:xfrm>
-          <a:prstGeom prst="rect">
-            <a:avLst/>
-          </a:prstGeom>
-        </p:spPr>
-      </p:pic>
     </p:spTree>
   </p:cSld>
   <p:clrMapOvr>
@@ -11697,7 +11070,23 @@
 
 <file path=ppt/slides/slide9.xml><?xml version="1.0" encoding="utf-8"?>
 <p:sld xmlns:a="http://schemas.openxmlformats.org/drawingml/2006/main" xmlns:r="http://schemas.openxmlformats.org/officeDocument/2006/relationships" xmlns:p="http://schemas.openxmlformats.org/presentationml/2006/main">
+  <p:bg>
+    <p:bgPr>
+      <a:solidFill>
+        <a:srgbClr val="FAF6EE"/>
+      </a:solidFill>
+      <a:effectLst/>
+    </p:bgPr>
+  </p:bg>
   <p:cSld name="Slide 9">
+    <p:bg>
+      <p:bgPr>
+        <a:solidFill>
+          <a:srgbClr val="FAF6EE"/>
+        </a:solidFill>
+        <a:effectLst/>
+      </p:bgPr>
+    </p:bg>
     <p:spTree>
       <p:nvGrpSpPr>
         <p:cNvPr id="1" name=""/>
@@ -11841,7 +11230,40 @@
         <p:txBody>
           <a:bodyPr wrap="square" lIns="127000" tIns="127000" rIns="127000" bIns="127000" rtlCol="0" anchor="ctr"/>
           <a:lstStyle/>
-          <a:p/>
+          <a:p>
+            <a:pPr marL="0" indent="0" algn="ctr">
+              <a:buNone/>
+            </a:pPr>
+            <a:r>
+              <a:rPr lang="en-US" sz="1400" dirty="0">
+                <a:solidFill>
+                  <a:srgbClr val="1D4ED8"/>
+                </a:solidFill>
+                <a:latin typeface="Courier New" pitchFamily="34" charset="0"/>
+                <a:ea typeface="Courier New" pitchFamily="34" charset="-122"/>
+                <a:cs typeface="Courier New" pitchFamily="34" charset="-120"/>
+              </a:rPr>
+              <a:t>SCREENSHOT</a:t>
+            </a:r>
+            <a:endParaRPr lang="en-US" sz="1400" dirty="0"/>
+          </a:p>
+          <a:p>
+            <a:pPr marL="0" indent="0" algn="ctr">
+              <a:buNone/>
+            </a:pPr>
+            <a:r>
+              <a:rPr lang="en-US" sz="1400" dirty="0">
+                <a:solidFill>
+                  <a:srgbClr val="1D4ED8"/>
+                </a:solidFill>
+                <a:latin typeface="Courier New" pitchFamily="34" charset="0"/>
+                <a:ea typeface="Courier New" pitchFamily="34" charset="-122"/>
+                <a:cs typeface="Courier New" pitchFamily="34" charset="-120"/>
+              </a:rPr>
+              <a:t>Live dashboard: budget gauge, reasoning terminal, metric charts</a:t>
+            </a:r>
+            <a:endParaRPr lang="en-US" sz="1400" dirty="0"/>
+          </a:p>
         </p:txBody>
       </p:sp>
       <p:sp>
@@ -11895,7 +11317,40 @@
         <p:txBody>
           <a:bodyPr wrap="square" lIns="127000" tIns="127000" rIns="127000" bIns="127000" rtlCol="0" anchor="ctr"/>
           <a:lstStyle/>
-          <a:p/>
+          <a:p>
+            <a:pPr marL="0" indent="0" algn="ctr">
+              <a:buNone/>
+            </a:pPr>
+            <a:r>
+              <a:rPr lang="en-US" sz="1400" dirty="0">
+                <a:solidFill>
+                  <a:srgbClr val="1D4ED8"/>
+                </a:solidFill>
+                <a:latin typeface="Courier New" pitchFamily="34" charset="0"/>
+                <a:ea typeface="Courier New" pitchFamily="34" charset="-122"/>
+                <a:cs typeface="Courier New" pitchFamily="34" charset="-120"/>
+              </a:rPr>
+              <a:t>SCREENSHOT</a:t>
+            </a:r>
+            <a:endParaRPr lang="en-US" sz="1400" dirty="0"/>
+          </a:p>
+          <a:p>
+            <a:pPr marL="0" indent="0" algn="ctr">
+              <a:buNone/>
+            </a:pPr>
+            <a:r>
+              <a:rPr lang="en-US" sz="1400" dirty="0">
+                <a:solidFill>
+                  <a:srgbClr val="1D4ED8"/>
+                </a:solidFill>
+                <a:latin typeface="Courier New" pitchFamily="34" charset="0"/>
+                <a:ea typeface="Courier New" pitchFamily="34" charset="-122"/>
+                <a:cs typeface="Courier New" pitchFamily="34" charset="-120"/>
+              </a:rPr>
+              <a:t>Hyperparameter table with champion run highlighted</a:t>
+            </a:r>
+            <a:endParaRPr lang="en-US" sz="1400" dirty="0"/>
+          </a:p>
         </p:txBody>
       </p:sp>
       <p:sp>
@@ -11991,15 +11446,8 @@
           <a:bodyPr wrap="square" lIns="0" tIns="0" rIns="0" bIns="0" rtlCol="0" anchor="t"/>
           <a:lstStyle/>
           <a:p>
-            <a:pPr>
-              <a:defRPr sz="1000" i="1">
-                <a:solidFill>
-                  <a:srgbClr val="0F766E"/>
-                </a:solidFill>
-              </a:defRPr>
-            </a:pPr>
-            <a:r>
-              <a:t>"RESULTS.md Executive Summary (Run #12): Prioritized generalization gap closure over raw depth. Pruned tree depth (6 → 5) and scaled L2 penalty to 14.0 (+366%) with Balanced class weighting. Overfitting index plunged by 38.9% (11.27% → 6.88%) while expanding separation margin by +18.0% (0.3121 → 0.3683). Champion Model #12 achieves 0.8506 OOF ROC-AUC and 0.8443 Sealed Holdout ROC-AUC with 78.9% recall at J*=0.49."</a:t>
+            <a:r>
+              <a:t>"Overfit gap prioritized: pruned depth (6 to 5) and scaled L2 penalty to 14.0 (+366%) with Balanced class weighting. Overfitting index dropped 38.9% (11.27% to 6.88%) while widening class separation margin to 0.3683 (+18.0%). Champion Model #12 achieves 0.8506 OOF ROC-AUC and 0.8443 Sealed Holdout ROC-AUC."</a:t>
             </a:r>
           </a:p>
         </p:txBody>
@@ -12058,11 +11506,7 @@
           <a:p>
             <a:pPr marL="0" indent="0" algn="ctr">
               <a:buNone/>
-              <a:defRPr b="1" sz="950">
-                <a:solidFill>
-                  <a:srgbClr val="0B1F3A"/>
-                </a:solidFill>
-              </a:defRPr>
+              <a:defRPr b="1"/>
             </a:pPr>
             <a:r>
               <a:t>SAMPLE PREDICTIONS (SEALED HOLDOUT - 1,409 ROWS)</a:t>
@@ -12070,39 +11514,18 @@
             <a:endParaRPr lang="en-US" sz="1400" dirty="0"/>
           </a:p>
           <a:p>
-            <a:pPr>
-              <a:defRPr sz="900" b="1">
-                <a:solidFill>
-                  <a:srgbClr val="DC2626"/>
-                </a:solidFill>
-              </a:defRPr>
-            </a:pPr>
             <a:r>
               <a:t>• CUST_00001: 89.3% churn risk [HIGH HAZARD - Fiber, M2M]</a:t>
             </a:r>
           </a:p>
           <a:p>
-            <a:pPr>
-              <a:defRPr sz="900" b="1">
-                <a:solidFill>
-                  <a:srgbClr val="0F766E"/>
-                </a:solidFill>
-              </a:defRPr>
-            </a:pPr>
             <a:r>
               <a:t>• CUST_00004: 1.8% churn risk [LOYAL / STABLE - 2-Year]</a:t>
             </a:r>
           </a:p>
           <a:p>
-            <a:pPr>
-              <a:defRPr sz="850">
-                <a:solidFill>
-                  <a:srgbClr val="475569"/>
-                </a:solidFill>
-              </a:defRPr>
-            </a:pPr>
-            <a:r>
-              <a:t>• Cutoff J*=0.49: 78.9% recall (295/374 caught, 79 missed)</a:t>
+            <a:r>
+              <a:t>• Decision Cutoff J* = 0.49: 78.9% recall (295/374 caught)</a:t>
             </a:r>
           </a:p>
         </p:txBody>
@@ -12155,54 +11578,6 @@
           </a:p>
         </p:txBody>
       </p:sp>
-      <p:pic>
-        <p:nvPicPr>
-          <p:cNvPr id="26" name="Picture 25" descr="dashboard_preview.png"/>
-          <p:cNvPicPr>
-            <a:picLocks noChangeAspect="1"/>
-          </p:cNvPicPr>
-          <p:nvPr/>
-        </p:nvPicPr>
-        <p:blipFill>
-          <a:blip r:embed="rId5"/>
-          <a:stretch>
-            <a:fillRect/>
-          </a:stretch>
-        </p:blipFill>
-        <p:spPr>
-          <a:xfrm>
-            <a:off x="548640" y="1280160"/>
-            <a:ext cx="5486400" cy="3017520"/>
-          </a:xfrm>
-          <a:prstGeom prst="rect">
-            <a:avLst/>
-          </a:prstGeom>
-        </p:spPr>
-      </p:pic>
-      <p:pic>
-        <p:nvPicPr>
-          <p:cNvPr id="27" name="Picture 26" descr="hyperparameters_preview.png"/>
-          <p:cNvPicPr>
-            <a:picLocks noChangeAspect="1"/>
-          </p:cNvPicPr>
-          <p:nvPr/>
-        </p:nvPicPr>
-        <p:blipFill>
-          <a:blip r:embed="rId6"/>
-          <a:stretch>
-            <a:fillRect/>
-          </a:stretch>
-        </p:blipFill>
-        <p:spPr>
-          <a:xfrm>
-            <a:off x="6172200" y="1280160"/>
-            <a:ext cx="5486400" cy="3017520"/>
-          </a:xfrm>
-          <a:prstGeom prst="rect">
-            <a:avLst/>
-          </a:prstGeom>
-        </p:spPr>
-      </p:pic>
     </p:spTree>
   </p:cSld>
   <p:clrMapOvr>

--- a/ppt/QUANTA_PPT_FINAL.pptx
+++ b/ppt/QUANTA_PPT_FINAL.pptx
@@ -1630,6 +1630,30 @@
           <a:chExt cx="0" cy="0"/>
         </a:xfrm>
       </p:grpSpPr>
+      <p:pic>
+        <p:nvPicPr>
+          <p:cNvPr id="26" name="Picture 25" descr="cream_wireframe_bg.png"/>
+          <p:cNvPicPr>
+            <a:picLocks noChangeAspect="1"/>
+          </p:cNvPicPr>
+          <p:nvPr/>
+        </p:nvPicPr>
+        <p:blipFill>
+          <a:blip r:embed="rId3"/>
+          <a:stretch>
+            <a:fillRect/>
+          </a:stretch>
+        </p:blipFill>
+        <p:spPr>
+          <a:xfrm>
+            <a:off x="0" y="0"/>
+            <a:ext cx="12192000" cy="6858000"/>
+          </a:xfrm>
+          <a:prstGeom prst="rect">
+            <a:avLst/>
+          </a:prstGeom>
+        </p:spPr>
+      </p:pic>
       <p:sp>
         <p:nvSpPr>
           <p:cNvPr id="2" name="Text 0"/>
@@ -2225,6 +2249,30 @@
           <a:chExt cx="0" cy="0"/>
         </a:xfrm>
       </p:grpSpPr>
+      <p:pic>
+        <p:nvPicPr>
+          <p:cNvPr id="26" name="Picture 25" descr="cream_wireframe_bg.png"/>
+          <p:cNvPicPr>
+            <a:picLocks noChangeAspect="1"/>
+          </p:cNvPicPr>
+          <p:nvPr/>
+        </p:nvPicPr>
+        <p:blipFill>
+          <a:blip r:embed="rId3"/>
+          <a:stretch>
+            <a:fillRect/>
+          </a:stretch>
+        </p:blipFill>
+        <p:spPr>
+          <a:xfrm>
+            <a:off x="0" y="0"/>
+            <a:ext cx="12192000" cy="6858000"/>
+          </a:xfrm>
+          <a:prstGeom prst="rect">
+            <a:avLst/>
+          </a:prstGeom>
+        </p:spPr>
+      </p:pic>
       <p:sp>
         <p:nvSpPr>
           <p:cNvPr id="2" name="Text 0"/>
@@ -2884,6 +2932,30 @@
           <a:chExt cx="0" cy="0"/>
         </a:xfrm>
       </p:grpSpPr>
+      <p:pic>
+        <p:nvPicPr>
+          <p:cNvPr id="26" name="Picture 25" descr="cream_wireframe_bg.png"/>
+          <p:cNvPicPr>
+            <a:picLocks noChangeAspect="1"/>
+          </p:cNvPicPr>
+          <p:nvPr/>
+        </p:nvPicPr>
+        <p:blipFill>
+          <a:blip r:embed="rId3"/>
+          <a:stretch>
+            <a:fillRect/>
+          </a:stretch>
+        </p:blipFill>
+        <p:spPr>
+          <a:xfrm>
+            <a:off x="0" y="0"/>
+            <a:ext cx="12192000" cy="6858000"/>
+          </a:xfrm>
+          <a:prstGeom prst="rect">
+            <a:avLst/>
+          </a:prstGeom>
+        </p:spPr>
+      </p:pic>
       <p:sp>
         <p:nvSpPr>
           <p:cNvPr id="2" name="Text 0"/>
@@ -3678,6 +3750,30 @@
           <a:chExt cx="0" cy="0"/>
         </a:xfrm>
       </p:grpSpPr>
+      <p:pic>
+        <p:nvPicPr>
+          <p:cNvPr id="26" name="Picture 25" descr="cream_wireframe_bg.png"/>
+          <p:cNvPicPr>
+            <a:picLocks noChangeAspect="1"/>
+          </p:cNvPicPr>
+          <p:nvPr/>
+        </p:nvPicPr>
+        <p:blipFill>
+          <a:blip r:embed="rId3"/>
+          <a:stretch>
+            <a:fillRect/>
+          </a:stretch>
+        </p:blipFill>
+        <p:spPr>
+          <a:xfrm>
+            <a:off x="0" y="0"/>
+            <a:ext cx="12192000" cy="6858000"/>
+          </a:xfrm>
+          <a:prstGeom prst="rect">
+            <a:avLst/>
+          </a:prstGeom>
+        </p:spPr>
+      </p:pic>
       <p:sp>
         <p:nvSpPr>
           <p:cNvPr id="2" name="Text 0"/>
@@ -4650,6 +4746,30 @@
           <a:chExt cx="0" cy="0"/>
         </a:xfrm>
       </p:grpSpPr>
+      <p:pic>
+        <p:nvPicPr>
+          <p:cNvPr id="30" name="Picture 29" descr="cream_wireframe_bg.png"/>
+          <p:cNvPicPr>
+            <a:picLocks noChangeAspect="1"/>
+          </p:cNvPicPr>
+          <p:nvPr/>
+        </p:nvPicPr>
+        <p:blipFill>
+          <a:blip r:embed="rId3"/>
+          <a:stretch>
+            <a:fillRect/>
+          </a:stretch>
+        </p:blipFill>
+        <p:spPr>
+          <a:xfrm>
+            <a:off x="0" y="0"/>
+            <a:ext cx="12192000" cy="6858000"/>
+          </a:xfrm>
+          <a:prstGeom prst="rect">
+            <a:avLst/>
+          </a:prstGeom>
+        </p:spPr>
+      </p:pic>
       <p:sp>
         <p:nvSpPr>
           <p:cNvPr id="2" name="Text 0"/>
@@ -5881,6 +6001,30 @@
           <a:chExt cx="0" cy="0"/>
         </a:xfrm>
       </p:grpSpPr>
+      <p:pic>
+        <p:nvPicPr>
+          <p:cNvPr id="28" name="Picture 27" descr="cream_wireframe_bg.png"/>
+          <p:cNvPicPr>
+            <a:picLocks noChangeAspect="1"/>
+          </p:cNvPicPr>
+          <p:nvPr/>
+        </p:nvPicPr>
+        <p:blipFill>
+          <a:blip r:embed="rId3"/>
+          <a:stretch>
+            <a:fillRect/>
+          </a:stretch>
+        </p:blipFill>
+        <p:spPr>
+          <a:xfrm>
+            <a:off x="0" y="0"/>
+            <a:ext cx="12192000" cy="6858000"/>
+          </a:xfrm>
+          <a:prstGeom prst="rect">
+            <a:avLst/>
+          </a:prstGeom>
+        </p:spPr>
+      </p:pic>
       <p:sp>
         <p:nvSpPr>
           <p:cNvPr id="2" name="Text 0"/>
@@ -6959,6 +7103,30 @@
           <a:chExt cx="0" cy="0"/>
         </a:xfrm>
       </p:grpSpPr>
+      <p:pic>
+        <p:nvPicPr>
+          <p:cNvPr id="26" name="Picture 25" descr="cream_wireframe_bg.png"/>
+          <p:cNvPicPr>
+            <a:picLocks noChangeAspect="1"/>
+          </p:cNvPicPr>
+          <p:nvPr/>
+        </p:nvPicPr>
+        <p:blipFill>
+          <a:blip r:embed="rId3"/>
+          <a:stretch>
+            <a:fillRect/>
+          </a:stretch>
+        </p:blipFill>
+        <p:spPr>
+          <a:xfrm>
+            <a:off x="0" y="0"/>
+            <a:ext cx="12192000" cy="6858000"/>
+          </a:xfrm>
+          <a:prstGeom prst="rect">
+            <a:avLst/>
+          </a:prstGeom>
+        </p:spPr>
+      </p:pic>
       <p:sp>
         <p:nvSpPr>
           <p:cNvPr id="2" name="Text 0"/>
@@ -7804,6 +7972,30 @@
           <a:chExt cx="0" cy="0"/>
         </a:xfrm>
       </p:grpSpPr>
+      <p:pic>
+        <p:nvPicPr>
+          <p:cNvPr id="35" name="Picture 34" descr="cream_wireframe_bg.png"/>
+          <p:cNvPicPr>
+            <a:picLocks noChangeAspect="1"/>
+          </p:cNvPicPr>
+          <p:nvPr/>
+        </p:nvPicPr>
+        <p:blipFill>
+          <a:blip r:embed="rId3"/>
+          <a:stretch>
+            <a:fillRect/>
+          </a:stretch>
+        </p:blipFill>
+        <p:spPr>
+          <a:xfrm>
+            <a:off x="0" y="0"/>
+            <a:ext cx="12192000" cy="6858000"/>
+          </a:xfrm>
+          <a:prstGeom prst="rect">
+            <a:avLst/>
+          </a:prstGeom>
+        </p:spPr>
+      </p:pic>
       <p:sp>
         <p:nvSpPr>
           <p:cNvPr id="2" name="Text 0"/>
@@ -8997,6 +9189,30 @@
           <a:chExt cx="0" cy="0"/>
         </a:xfrm>
       </p:grpSpPr>
+      <p:pic>
+        <p:nvPicPr>
+          <p:cNvPr id="26" name="Picture 25" descr="cream_wireframe_bg.png"/>
+          <p:cNvPicPr>
+            <a:picLocks noChangeAspect="1"/>
+          </p:cNvPicPr>
+          <p:nvPr/>
+        </p:nvPicPr>
+        <p:blipFill>
+          <a:blip r:embed="rId3"/>
+          <a:stretch>
+            <a:fillRect/>
+          </a:stretch>
+        </p:blipFill>
+        <p:spPr>
+          <a:xfrm>
+            <a:off x="0" y="0"/>
+            <a:ext cx="12192000" cy="6858000"/>
+          </a:xfrm>
+          <a:prstGeom prst="rect">
+            <a:avLst/>
+          </a:prstGeom>
+        </p:spPr>
+      </p:pic>
       <p:sp>
         <p:nvSpPr>
           <p:cNvPr id="2" name="Text 0"/>
@@ -11101,6 +11317,30 @@
           <a:chExt cx="0" cy="0"/>
         </a:xfrm>
       </p:grpSpPr>
+      <p:pic>
+        <p:nvPicPr>
+          <p:cNvPr id="26" name="Picture 25" descr="cream_wireframe_bg.png"/>
+          <p:cNvPicPr>
+            <a:picLocks noChangeAspect="1"/>
+          </p:cNvPicPr>
+          <p:nvPr/>
+        </p:nvPicPr>
+        <p:blipFill>
+          <a:blip r:embed="rId3"/>
+          <a:stretch>
+            <a:fillRect/>
+          </a:stretch>
+        </p:blipFill>
+        <p:spPr>
+          <a:xfrm>
+            <a:off x="0" y="0"/>
+            <a:ext cx="12192000" cy="6858000"/>
+          </a:xfrm>
+          <a:prstGeom prst="rect">
+            <a:avLst/>
+          </a:prstGeom>
+        </p:spPr>
+      </p:pic>
       <p:sp>
         <p:nvSpPr>
           <p:cNvPr id="2" name="Text 0"/>
